--- a/slides/3-5_neuromuscular_blockers/3-5_neuromuscular_blockers.pptx
+++ b/slides/3-5_neuromuscular_blockers/3-5_neuromuscular_blockers.pptx
@@ -2245,7 +2245,7 @@
           </a:xfrm>
           <a:prstGeom prst="roundRect">
             <a:avLst>
-              <a:gd name="adj" fmla="val 15625"/>
+              <a:gd name="adj" fmla="val 7813"/>
             </a:avLst>
           </a:prstGeom>
           <a:solidFill>
@@ -2254,14 +2254,14 @@
           <a:ln/>
         </p:spPr>
         <p:txBody>
-          <a:bodyPr wrap="square" lIns="0" tIns="0" rIns="0" bIns="0" rtlCol="0" anchor="ctr"/>
+          <a:bodyPr wrap="none" lIns="0" tIns="0" rIns="0" bIns="0" rtlCol="0" anchor="ctr"/>
           <a:lstStyle/>
           <a:p>
             <a:pPr algn="ctr" indent="0" marL="0">
               <a:buNone/>
             </a:pPr>
             <a:r>
-              <a:rPr lang="ja-JP" altLang="en-US" sz="1100" dirty="0">
+              <a:rPr lang="ja-JP" altLang="en-US" sz="1050" dirty="0">
                 <a:solidFill>
                   <a:srgbClr val="404040"/>
                 </a:solidFill>
@@ -2271,7 +2271,7 @@
               </a:rPr>
               <a:t>仕組み</a:t>
             </a:r>
-            <a:endParaRPr lang="ja-JP" sz="1100" dirty="0"/>
+            <a:endParaRPr lang="ja-JP" sz="1050" dirty="0"/>
           </a:p>
         </p:txBody>
       </p:sp>
@@ -2288,7 +2288,7 @@
           </a:xfrm>
           <a:prstGeom prst="roundRect">
             <a:avLst>
-              <a:gd name="adj" fmla="val 15625"/>
+              <a:gd name="adj" fmla="val 7813"/>
             </a:avLst>
           </a:prstGeom>
           <a:solidFill>
@@ -2297,14 +2297,14 @@
           <a:ln/>
         </p:spPr>
         <p:txBody>
-          <a:bodyPr wrap="square" lIns="0" tIns="0" rIns="0" bIns="0" rtlCol="0" anchor="ctr"/>
+          <a:bodyPr wrap="none" lIns="0" tIns="0" rIns="0" bIns="0" rtlCol="0" anchor="ctr"/>
           <a:lstStyle/>
           <a:p>
             <a:pPr algn="ctr" indent="0" marL="0">
               <a:buNone/>
             </a:pPr>
             <a:r>
-              <a:rPr lang="ja-JP" altLang="en-US" sz="1100" dirty="0">
+              <a:rPr lang="ja-JP" altLang="en-US" sz="1050" dirty="0">
                 <a:solidFill>
                   <a:srgbClr val="404040"/>
                 </a:solidFill>
@@ -2314,14 +2314,14 @@
               </a:rPr>
               <a:t>ロクロ</a:t>
             </a:r>
-            <a:endParaRPr lang="ja-JP" sz="1100" dirty="0"/>
+            <a:endParaRPr lang="ja-JP" sz="1050" dirty="0"/>
           </a:p>
           <a:p>
             <a:pPr algn="ctr" indent="0" marL="0">
               <a:buNone/>
             </a:pPr>
             <a:r>
-              <a:rPr lang="ja-JP" altLang="en-US" sz="1100" dirty="0">
+              <a:rPr lang="ja-JP" altLang="en-US" sz="1050" dirty="0">
                 <a:solidFill>
                   <a:srgbClr val="404040"/>
                 </a:solidFill>
@@ -2331,7 +2331,7 @@
               </a:rPr>
               <a:t>ニウム</a:t>
             </a:r>
-            <a:endParaRPr lang="ja-JP" sz="1100" dirty="0"/>
+            <a:endParaRPr lang="ja-JP" sz="1050" dirty="0"/>
           </a:p>
         </p:txBody>
       </p:sp>
@@ -2348,7 +2348,7 @@
           </a:xfrm>
           <a:prstGeom prst="roundRect">
             <a:avLst>
-              <a:gd name="adj" fmla="val 15625"/>
+              <a:gd name="adj" fmla="val 7813"/>
             </a:avLst>
           </a:prstGeom>
           <a:solidFill>
@@ -2357,14 +2357,14 @@
           <a:ln/>
         </p:spPr>
         <p:txBody>
-          <a:bodyPr wrap="square" lIns="0" tIns="0" rIns="0" bIns="0" rtlCol="0" anchor="ctr"/>
+          <a:bodyPr wrap="none" lIns="0" tIns="0" rIns="0" bIns="0" rtlCol="0" anchor="ctr"/>
           <a:lstStyle/>
           <a:p>
             <a:pPr algn="ctr" indent="0" marL="0">
               <a:buNone/>
             </a:pPr>
             <a:r>
-              <a:rPr lang="ja-JP" altLang="en-US" sz="1100" dirty="0">
+              <a:rPr lang="ja-JP" altLang="en-US" sz="1050" dirty="0">
                 <a:solidFill>
                   <a:srgbClr val="404040"/>
                 </a:solidFill>
@@ -2374,14 +2374,14 @@
               </a:rPr>
               <a:t>スキサメ</a:t>
             </a:r>
-            <a:endParaRPr lang="ja-JP" sz="1100" dirty="0"/>
+            <a:endParaRPr lang="ja-JP" sz="1050" dirty="0"/>
           </a:p>
           <a:p>
             <a:pPr algn="ctr" indent="0" marL="0">
               <a:buNone/>
             </a:pPr>
             <a:r>
-              <a:rPr lang="ja-JP" altLang="en-US" sz="1100" dirty="0">
+              <a:rPr lang="ja-JP" altLang="en-US" sz="1050" dirty="0">
                 <a:solidFill>
                   <a:srgbClr val="404040"/>
                 </a:solidFill>
@@ -2391,7 +2391,7 @@
               </a:rPr>
               <a:t>トニウム</a:t>
             </a:r>
-            <a:endParaRPr lang="ja-JP" sz="1100" dirty="0"/>
+            <a:endParaRPr lang="ja-JP" sz="1050" dirty="0"/>
           </a:p>
         </p:txBody>
       </p:sp>
@@ -2408,7 +2408,7 @@
           </a:xfrm>
           <a:prstGeom prst="roundRect">
             <a:avLst>
-              <a:gd name="adj" fmla="val 15625"/>
+              <a:gd name="adj" fmla="val 7813"/>
             </a:avLst>
           </a:prstGeom>
           <a:solidFill>
@@ -2417,14 +2417,14 @@
           <a:ln/>
         </p:spPr>
         <p:txBody>
-          <a:bodyPr wrap="square" lIns="0" tIns="0" rIns="0" bIns="0" rtlCol="0" anchor="ctr"/>
+          <a:bodyPr wrap="none" lIns="0" tIns="0" rIns="0" bIns="0" rtlCol="0" anchor="ctr"/>
           <a:lstStyle/>
           <a:p>
             <a:pPr algn="ctr" indent="0" marL="0">
               <a:buNone/>
             </a:pPr>
             <a:r>
-              <a:rPr lang="ja-JP" altLang="en-US" sz="1100" dirty="0">
+              <a:rPr lang="ja-JP" altLang="en-US" sz="1050" dirty="0">
                 <a:solidFill>
                   <a:srgbClr val="404040"/>
                 </a:solidFill>
@@ -2434,14 +2434,14 @@
               </a:rPr>
               <a:t>重い</a:t>
             </a:r>
-            <a:endParaRPr lang="ja-JP" sz="1100" dirty="0"/>
+            <a:endParaRPr lang="ja-JP" sz="1050" dirty="0"/>
           </a:p>
           <a:p>
             <a:pPr algn="ctr" indent="0" marL="0">
               <a:buNone/>
             </a:pPr>
             <a:r>
-              <a:rPr lang="ja-JP" altLang="en-US" sz="1100" dirty="0">
+              <a:rPr lang="ja-JP" altLang="en-US" sz="1050" dirty="0">
                 <a:solidFill>
                   <a:srgbClr val="404040"/>
                 </a:solidFill>
@@ -2451,7 +2451,7 @@
               </a:rPr>
               <a:t>副作用</a:t>
             </a:r>
-            <a:endParaRPr lang="ja-JP" sz="1100" dirty="0"/>
+            <a:endParaRPr lang="ja-JP" sz="1050" dirty="0"/>
           </a:p>
         </p:txBody>
       </p:sp>
@@ -2468,7 +2468,7 @@
           </a:xfrm>
           <a:prstGeom prst="roundRect">
             <a:avLst>
-              <a:gd name="adj" fmla="val 15625"/>
+              <a:gd name="adj" fmla="val 7813"/>
             </a:avLst>
           </a:prstGeom>
           <a:solidFill>
@@ -2477,14 +2477,14 @@
           <a:ln/>
         </p:spPr>
         <p:txBody>
-          <a:bodyPr wrap="square" lIns="0" tIns="0" rIns="0" bIns="0" rtlCol="0" anchor="ctr"/>
+          <a:bodyPr wrap="none" lIns="0" tIns="0" rIns="0" bIns="0" rtlCol="0" anchor="ctr"/>
           <a:lstStyle/>
           <a:p>
             <a:pPr algn="ctr" indent="0" marL="0">
               <a:buNone/>
             </a:pPr>
             <a:r>
-              <a:rPr lang="ja-JP" altLang="en-US" sz="1100" b="1" dirty="0">
+              <a:rPr lang="ja-JP" altLang="en-US" sz="1050" b="1" dirty="0">
                 <a:solidFill>
                   <a:srgbClr val="FFFFFF"/>
                 </a:solidFill>
@@ -2494,7 +2494,7 @@
               </a:rPr>
               <a:t>使い方</a:t>
             </a:r>
-            <a:endParaRPr lang="ja-JP" sz="1100" dirty="0"/>
+            <a:endParaRPr lang="ja-JP" sz="1050" dirty="0"/>
           </a:p>
         </p:txBody>
       </p:sp>
@@ -2584,8 +2584,8 @@
         </p:nvSpPr>
         <p:spPr>
           <a:xfrm>
-            <a:off x="502920" y="1874520"/>
-            <a:ext cx="11155680" cy="3703320"/>
+            <a:off x="502920" y="1819656"/>
+            <a:ext cx="11155680" cy="4087368"/>
           </a:xfrm>
           <a:prstGeom prst="rect">
             <a:avLst/>
@@ -2599,7 +2599,7 @@
           <a:p>
             <a:pPr algn="l" marL="355600" indent="-355600">
               <a:spcAft>
-                <a:spcPts val="2600"/>
+                <a:spcPts val="3200"/>
               </a:spcAft>
               <a:buSzPct val="100000"/>
               <a:buChar char="•"/>
@@ -2631,7 +2631,7 @@
           <a:p>
             <a:pPr algn="l" marL="355600" indent="-355600">
               <a:spcAft>
-                <a:spcPts val="2600"/>
+                <a:spcPts val="3200"/>
               </a:spcAft>
               <a:buSzPct val="100000"/>
               <a:buChar char="•"/>
@@ -2663,7 +2663,7 @@
           <a:p>
             <a:pPr algn="l" marL="355600" indent="-355600">
               <a:spcAft>
-                <a:spcPts val="2600"/>
+                <a:spcPts val="3200"/>
               </a:spcAft>
               <a:buSzPct val="100000"/>
               <a:buChar char="•"/>
@@ -2695,7 +2695,7 @@
           <a:p>
             <a:pPr algn="l" marL="355600" indent="-355600">
               <a:spcAft>
-                <a:spcPts val="2600"/>
+                <a:spcPts val="3200"/>
               </a:spcAft>
               <a:buSzPct val="100000"/>
               <a:buChar char="•"/>
@@ -2716,7 +2716,7 @@
           <a:p>
             <a:pPr algn="l" marL="355600" indent="-355600">
               <a:spcAft>
-                <a:spcPts val="2600"/>
+                <a:spcPts val="3200"/>
               </a:spcAft>
               <a:buSzPct val="100000"/>
               <a:buChar char="•"/>
@@ -2856,7 +2856,7 @@
           </a:xfrm>
           <a:prstGeom prst="roundRect">
             <a:avLst>
-              <a:gd name="adj" fmla="val 15625"/>
+              <a:gd name="adj" fmla="val 7813"/>
             </a:avLst>
           </a:prstGeom>
           <a:solidFill>
@@ -2865,14 +2865,14 @@
           <a:ln/>
         </p:spPr>
         <p:txBody>
-          <a:bodyPr wrap="square" lIns="0" tIns="0" rIns="0" bIns="0" rtlCol="0" anchor="ctr"/>
+          <a:bodyPr wrap="none" lIns="0" tIns="0" rIns="0" bIns="0" rtlCol="0" anchor="ctr"/>
           <a:lstStyle/>
           <a:p>
             <a:pPr algn="ctr" indent="0" marL="0">
               <a:buNone/>
             </a:pPr>
             <a:r>
-              <a:rPr lang="ja-JP" altLang="en-US" sz="1100" b="1" dirty="0">
+              <a:rPr lang="ja-JP" altLang="en-US" sz="1050" b="1" dirty="0">
                 <a:solidFill>
                   <a:srgbClr val="FFFFFF"/>
                 </a:solidFill>
@@ -2882,7 +2882,7 @@
               </a:rPr>
               <a:t>仕組み</a:t>
             </a:r>
-            <a:endParaRPr lang="ja-JP" sz="1100" dirty="0"/>
+            <a:endParaRPr lang="ja-JP" sz="1050" dirty="0"/>
           </a:p>
         </p:txBody>
       </p:sp>
@@ -2899,7 +2899,7 @@
           </a:xfrm>
           <a:prstGeom prst="roundRect">
             <a:avLst>
-              <a:gd name="adj" fmla="val 15625"/>
+              <a:gd name="adj" fmla="val 7813"/>
             </a:avLst>
           </a:prstGeom>
           <a:solidFill>
@@ -2908,14 +2908,14 @@
           <a:ln/>
         </p:spPr>
         <p:txBody>
-          <a:bodyPr wrap="square" lIns="0" tIns="0" rIns="0" bIns="0" rtlCol="0" anchor="ctr"/>
+          <a:bodyPr wrap="none" lIns="0" tIns="0" rIns="0" bIns="0" rtlCol="0" anchor="ctr"/>
           <a:lstStyle/>
           <a:p>
             <a:pPr algn="ctr" indent="0" marL="0">
               <a:buNone/>
             </a:pPr>
             <a:r>
-              <a:rPr lang="ja-JP" altLang="en-US" sz="1100" dirty="0">
+              <a:rPr lang="ja-JP" altLang="en-US" sz="1050" dirty="0">
                 <a:solidFill>
                   <a:srgbClr val="404040"/>
                 </a:solidFill>
@@ -2925,14 +2925,14 @@
               </a:rPr>
               <a:t>ロクロ</a:t>
             </a:r>
-            <a:endParaRPr lang="ja-JP" sz="1100" dirty="0"/>
+            <a:endParaRPr lang="ja-JP" sz="1050" dirty="0"/>
           </a:p>
           <a:p>
             <a:pPr algn="ctr" indent="0" marL="0">
               <a:buNone/>
             </a:pPr>
             <a:r>
-              <a:rPr lang="ja-JP" altLang="en-US" sz="1100" dirty="0">
+              <a:rPr lang="ja-JP" altLang="en-US" sz="1050" dirty="0">
                 <a:solidFill>
                   <a:srgbClr val="404040"/>
                 </a:solidFill>
@@ -2942,7 +2942,7 @@
               </a:rPr>
               <a:t>ニウム</a:t>
             </a:r>
-            <a:endParaRPr lang="ja-JP" sz="1100" dirty="0"/>
+            <a:endParaRPr lang="ja-JP" sz="1050" dirty="0"/>
           </a:p>
         </p:txBody>
       </p:sp>
@@ -2959,7 +2959,7 @@
           </a:xfrm>
           <a:prstGeom prst="roundRect">
             <a:avLst>
-              <a:gd name="adj" fmla="val 15625"/>
+              <a:gd name="adj" fmla="val 7813"/>
             </a:avLst>
           </a:prstGeom>
           <a:solidFill>
@@ -2968,14 +2968,14 @@
           <a:ln/>
         </p:spPr>
         <p:txBody>
-          <a:bodyPr wrap="square" lIns="0" tIns="0" rIns="0" bIns="0" rtlCol="0" anchor="ctr"/>
+          <a:bodyPr wrap="none" lIns="0" tIns="0" rIns="0" bIns="0" rtlCol="0" anchor="ctr"/>
           <a:lstStyle/>
           <a:p>
             <a:pPr algn="ctr" indent="0" marL="0">
               <a:buNone/>
             </a:pPr>
             <a:r>
-              <a:rPr lang="ja-JP" altLang="en-US" sz="1100" dirty="0">
+              <a:rPr lang="ja-JP" altLang="en-US" sz="1050" dirty="0">
                 <a:solidFill>
                   <a:srgbClr val="404040"/>
                 </a:solidFill>
@@ -2985,14 +2985,14 @@
               </a:rPr>
               <a:t>スキサメ</a:t>
             </a:r>
-            <a:endParaRPr lang="ja-JP" sz="1100" dirty="0"/>
+            <a:endParaRPr lang="ja-JP" sz="1050" dirty="0"/>
           </a:p>
           <a:p>
             <a:pPr algn="ctr" indent="0" marL="0">
               <a:buNone/>
             </a:pPr>
             <a:r>
-              <a:rPr lang="ja-JP" altLang="en-US" sz="1100" dirty="0">
+              <a:rPr lang="ja-JP" altLang="en-US" sz="1050" dirty="0">
                 <a:solidFill>
                   <a:srgbClr val="404040"/>
                 </a:solidFill>
@@ -3002,7 +3002,7 @@
               </a:rPr>
               <a:t>トニウム</a:t>
             </a:r>
-            <a:endParaRPr lang="ja-JP" sz="1100" dirty="0"/>
+            <a:endParaRPr lang="ja-JP" sz="1050" dirty="0"/>
           </a:p>
         </p:txBody>
       </p:sp>
@@ -3019,7 +3019,7 @@
           </a:xfrm>
           <a:prstGeom prst="roundRect">
             <a:avLst>
-              <a:gd name="adj" fmla="val 15625"/>
+              <a:gd name="adj" fmla="val 7813"/>
             </a:avLst>
           </a:prstGeom>
           <a:solidFill>
@@ -3028,14 +3028,14 @@
           <a:ln/>
         </p:spPr>
         <p:txBody>
-          <a:bodyPr wrap="square" lIns="0" tIns="0" rIns="0" bIns="0" rtlCol="0" anchor="ctr"/>
+          <a:bodyPr wrap="none" lIns="0" tIns="0" rIns="0" bIns="0" rtlCol="0" anchor="ctr"/>
           <a:lstStyle/>
           <a:p>
             <a:pPr algn="ctr" indent="0" marL="0">
               <a:buNone/>
             </a:pPr>
             <a:r>
-              <a:rPr lang="ja-JP" altLang="en-US" sz="1100" dirty="0">
+              <a:rPr lang="ja-JP" altLang="en-US" sz="1050" dirty="0">
                 <a:solidFill>
                   <a:srgbClr val="404040"/>
                 </a:solidFill>
@@ -3045,14 +3045,14 @@
               </a:rPr>
               <a:t>重い</a:t>
             </a:r>
-            <a:endParaRPr lang="ja-JP" sz="1100" dirty="0"/>
+            <a:endParaRPr lang="ja-JP" sz="1050" dirty="0"/>
           </a:p>
           <a:p>
             <a:pPr algn="ctr" indent="0" marL="0">
               <a:buNone/>
             </a:pPr>
             <a:r>
-              <a:rPr lang="ja-JP" altLang="en-US" sz="1100" dirty="0">
+              <a:rPr lang="ja-JP" altLang="en-US" sz="1050" dirty="0">
                 <a:solidFill>
                   <a:srgbClr val="404040"/>
                 </a:solidFill>
@@ -3062,7 +3062,7 @@
               </a:rPr>
               <a:t>副作用</a:t>
             </a:r>
-            <a:endParaRPr lang="ja-JP" sz="1100" dirty="0"/>
+            <a:endParaRPr lang="ja-JP" sz="1050" dirty="0"/>
           </a:p>
         </p:txBody>
       </p:sp>
@@ -3079,7 +3079,7 @@
           </a:xfrm>
           <a:prstGeom prst="roundRect">
             <a:avLst>
-              <a:gd name="adj" fmla="val 15625"/>
+              <a:gd name="adj" fmla="val 7813"/>
             </a:avLst>
           </a:prstGeom>
           <a:solidFill>
@@ -3088,14 +3088,14 @@
           <a:ln/>
         </p:spPr>
         <p:txBody>
-          <a:bodyPr wrap="square" lIns="0" tIns="0" rIns="0" bIns="0" rtlCol="0" anchor="ctr"/>
+          <a:bodyPr wrap="none" lIns="0" tIns="0" rIns="0" bIns="0" rtlCol="0" anchor="ctr"/>
           <a:lstStyle/>
           <a:p>
             <a:pPr algn="ctr" indent="0" marL="0">
               <a:buNone/>
             </a:pPr>
             <a:r>
-              <a:rPr lang="ja-JP" altLang="en-US" sz="1100" dirty="0">
+              <a:rPr lang="ja-JP" altLang="en-US" sz="1050" dirty="0">
                 <a:solidFill>
                   <a:srgbClr val="404040"/>
                 </a:solidFill>
@@ -3105,7 +3105,7 @@
               </a:rPr>
               <a:t>使い方</a:t>
             </a:r>
-            <a:endParaRPr lang="ja-JP" sz="1100" dirty="0"/>
+            <a:endParaRPr lang="ja-JP" sz="1050" dirty="0"/>
           </a:p>
         </p:txBody>
       </p:sp>
@@ -3470,7 +3470,7 @@
             <a:r>
               <a:rPr lang="ja-JP" altLang="en-US" sz="2800" b="1" dirty="0">
                 <a:solidFill>
-                  <a:srgbClr val="D55E00"/>
+                  <a:srgbClr val="C00000"/>
                 </a:solidFill>
                 <a:latin typeface="メイリオ" pitchFamily="34" charset="0"/>
                 <a:ea typeface="メイリオ" pitchFamily="34" charset="-122"/>
@@ -3645,7 +3645,7 @@
             <a:r>
               <a:rPr lang="ja-JP" altLang="en-US" sz="2800" b="1" dirty="0">
                 <a:solidFill>
-                  <a:srgbClr val="D55E00"/>
+                  <a:srgbClr val="C00000"/>
                 </a:solidFill>
                 <a:latin typeface="メイリオ" pitchFamily="34" charset="0"/>
                 <a:ea typeface="メイリオ" pitchFamily="34" charset="-122"/>
@@ -3766,7 +3766,7 @@
           </a:xfrm>
           <a:prstGeom prst="roundRect">
             <a:avLst>
-              <a:gd name="adj" fmla="val 15625"/>
+              <a:gd name="adj" fmla="val 7813"/>
             </a:avLst>
           </a:prstGeom>
           <a:solidFill>
@@ -3775,14 +3775,14 @@
           <a:ln/>
         </p:spPr>
         <p:txBody>
-          <a:bodyPr wrap="square" lIns="0" tIns="0" rIns="0" bIns="0" rtlCol="0" anchor="ctr"/>
+          <a:bodyPr wrap="none" lIns="0" tIns="0" rIns="0" bIns="0" rtlCol="0" anchor="ctr"/>
           <a:lstStyle/>
           <a:p>
             <a:pPr algn="ctr" indent="0" marL="0">
               <a:buNone/>
             </a:pPr>
             <a:r>
-              <a:rPr lang="ja-JP" altLang="en-US" sz="1100" b="1" dirty="0">
+              <a:rPr lang="ja-JP" altLang="en-US" sz="1050" b="1" dirty="0">
                 <a:solidFill>
                   <a:srgbClr val="FFFFFF"/>
                 </a:solidFill>
@@ -3792,7 +3792,7 @@
               </a:rPr>
               <a:t>仕組み</a:t>
             </a:r>
-            <a:endParaRPr lang="ja-JP" sz="1100" dirty="0"/>
+            <a:endParaRPr lang="ja-JP" sz="1050" dirty="0"/>
           </a:p>
         </p:txBody>
       </p:sp>
@@ -3809,7 +3809,7 @@
           </a:xfrm>
           <a:prstGeom prst="roundRect">
             <a:avLst>
-              <a:gd name="adj" fmla="val 15625"/>
+              <a:gd name="adj" fmla="val 7813"/>
             </a:avLst>
           </a:prstGeom>
           <a:solidFill>
@@ -3818,14 +3818,14 @@
           <a:ln/>
         </p:spPr>
         <p:txBody>
-          <a:bodyPr wrap="square" lIns="0" tIns="0" rIns="0" bIns="0" rtlCol="0" anchor="ctr"/>
+          <a:bodyPr wrap="none" lIns="0" tIns="0" rIns="0" bIns="0" rtlCol="0" anchor="ctr"/>
           <a:lstStyle/>
           <a:p>
             <a:pPr algn="ctr" indent="0" marL="0">
               <a:buNone/>
             </a:pPr>
             <a:r>
-              <a:rPr lang="ja-JP" altLang="en-US" sz="1100" dirty="0">
+              <a:rPr lang="ja-JP" altLang="en-US" sz="1050" dirty="0">
                 <a:solidFill>
                   <a:srgbClr val="404040"/>
                 </a:solidFill>
@@ -3835,14 +3835,14 @@
               </a:rPr>
               <a:t>ロクロ</a:t>
             </a:r>
-            <a:endParaRPr lang="ja-JP" sz="1100" dirty="0"/>
+            <a:endParaRPr lang="ja-JP" sz="1050" dirty="0"/>
           </a:p>
           <a:p>
             <a:pPr algn="ctr" indent="0" marL="0">
               <a:buNone/>
             </a:pPr>
             <a:r>
-              <a:rPr lang="ja-JP" altLang="en-US" sz="1100" dirty="0">
+              <a:rPr lang="ja-JP" altLang="en-US" sz="1050" dirty="0">
                 <a:solidFill>
                   <a:srgbClr val="404040"/>
                 </a:solidFill>
@@ -3852,7 +3852,7 @@
               </a:rPr>
               <a:t>ニウム</a:t>
             </a:r>
-            <a:endParaRPr lang="ja-JP" sz="1100" dirty="0"/>
+            <a:endParaRPr lang="ja-JP" sz="1050" dirty="0"/>
           </a:p>
         </p:txBody>
       </p:sp>
@@ -3869,7 +3869,7 @@
           </a:xfrm>
           <a:prstGeom prst="roundRect">
             <a:avLst>
-              <a:gd name="adj" fmla="val 15625"/>
+              <a:gd name="adj" fmla="val 7813"/>
             </a:avLst>
           </a:prstGeom>
           <a:solidFill>
@@ -3878,14 +3878,14 @@
           <a:ln/>
         </p:spPr>
         <p:txBody>
-          <a:bodyPr wrap="square" lIns="0" tIns="0" rIns="0" bIns="0" rtlCol="0" anchor="ctr"/>
+          <a:bodyPr wrap="none" lIns="0" tIns="0" rIns="0" bIns="0" rtlCol="0" anchor="ctr"/>
           <a:lstStyle/>
           <a:p>
             <a:pPr algn="ctr" indent="0" marL="0">
               <a:buNone/>
             </a:pPr>
             <a:r>
-              <a:rPr lang="ja-JP" altLang="en-US" sz="1100" dirty="0">
+              <a:rPr lang="ja-JP" altLang="en-US" sz="1050" dirty="0">
                 <a:solidFill>
                   <a:srgbClr val="404040"/>
                 </a:solidFill>
@@ -3895,14 +3895,14 @@
               </a:rPr>
               <a:t>スキサメ</a:t>
             </a:r>
-            <a:endParaRPr lang="ja-JP" sz="1100" dirty="0"/>
+            <a:endParaRPr lang="ja-JP" sz="1050" dirty="0"/>
           </a:p>
           <a:p>
             <a:pPr algn="ctr" indent="0" marL="0">
               <a:buNone/>
             </a:pPr>
             <a:r>
-              <a:rPr lang="ja-JP" altLang="en-US" sz="1100" dirty="0">
+              <a:rPr lang="ja-JP" altLang="en-US" sz="1050" dirty="0">
                 <a:solidFill>
                   <a:srgbClr val="404040"/>
                 </a:solidFill>
@@ -3912,7 +3912,7 @@
               </a:rPr>
               <a:t>トニウム</a:t>
             </a:r>
-            <a:endParaRPr lang="ja-JP" sz="1100" dirty="0"/>
+            <a:endParaRPr lang="ja-JP" sz="1050" dirty="0"/>
           </a:p>
         </p:txBody>
       </p:sp>
@@ -3929,7 +3929,7 @@
           </a:xfrm>
           <a:prstGeom prst="roundRect">
             <a:avLst>
-              <a:gd name="adj" fmla="val 15625"/>
+              <a:gd name="adj" fmla="val 7813"/>
             </a:avLst>
           </a:prstGeom>
           <a:solidFill>
@@ -3938,14 +3938,14 @@
           <a:ln/>
         </p:spPr>
         <p:txBody>
-          <a:bodyPr wrap="square" lIns="0" tIns="0" rIns="0" bIns="0" rtlCol="0" anchor="ctr"/>
+          <a:bodyPr wrap="none" lIns="0" tIns="0" rIns="0" bIns="0" rtlCol="0" anchor="ctr"/>
           <a:lstStyle/>
           <a:p>
             <a:pPr algn="ctr" indent="0" marL="0">
               <a:buNone/>
             </a:pPr>
             <a:r>
-              <a:rPr lang="ja-JP" altLang="en-US" sz="1100" dirty="0">
+              <a:rPr lang="ja-JP" altLang="en-US" sz="1050" dirty="0">
                 <a:solidFill>
                   <a:srgbClr val="404040"/>
                 </a:solidFill>
@@ -3955,14 +3955,14 @@
               </a:rPr>
               <a:t>重い</a:t>
             </a:r>
-            <a:endParaRPr lang="ja-JP" sz="1100" dirty="0"/>
+            <a:endParaRPr lang="ja-JP" sz="1050" dirty="0"/>
           </a:p>
           <a:p>
             <a:pPr algn="ctr" indent="0" marL="0">
               <a:buNone/>
             </a:pPr>
             <a:r>
-              <a:rPr lang="ja-JP" altLang="en-US" sz="1100" dirty="0">
+              <a:rPr lang="ja-JP" altLang="en-US" sz="1050" dirty="0">
                 <a:solidFill>
                   <a:srgbClr val="404040"/>
                 </a:solidFill>
@@ -3972,7 +3972,7 @@
               </a:rPr>
               <a:t>副作用</a:t>
             </a:r>
-            <a:endParaRPr lang="ja-JP" sz="1100" dirty="0"/>
+            <a:endParaRPr lang="ja-JP" sz="1050" dirty="0"/>
           </a:p>
         </p:txBody>
       </p:sp>
@@ -3989,7 +3989,7 @@
           </a:xfrm>
           <a:prstGeom prst="roundRect">
             <a:avLst>
-              <a:gd name="adj" fmla="val 15625"/>
+              <a:gd name="adj" fmla="val 7813"/>
             </a:avLst>
           </a:prstGeom>
           <a:solidFill>
@@ -3998,14 +3998,14 @@
           <a:ln/>
         </p:spPr>
         <p:txBody>
-          <a:bodyPr wrap="square" lIns="0" tIns="0" rIns="0" bIns="0" rtlCol="0" anchor="ctr"/>
+          <a:bodyPr wrap="none" lIns="0" tIns="0" rIns="0" bIns="0" rtlCol="0" anchor="ctr"/>
           <a:lstStyle/>
           <a:p>
             <a:pPr algn="ctr" indent="0" marL="0">
               <a:buNone/>
             </a:pPr>
             <a:r>
-              <a:rPr lang="ja-JP" altLang="en-US" sz="1100" dirty="0">
+              <a:rPr lang="ja-JP" altLang="en-US" sz="1050" dirty="0">
                 <a:solidFill>
                   <a:srgbClr val="404040"/>
                 </a:solidFill>
@@ -4015,7 +4015,7 @@
               </a:rPr>
               <a:t>使い方</a:t>
             </a:r>
-            <a:endParaRPr lang="ja-JP" sz="1100" dirty="0"/>
+            <a:endParaRPr lang="ja-JP" sz="1050" dirty="0"/>
           </a:p>
         </p:txBody>
       </p:sp>
@@ -4210,8 +4210,8 @@
         </p:nvSpPr>
         <p:spPr>
           <a:xfrm>
-            <a:off x="640080" y="2688336"/>
-            <a:ext cx="5161788" cy="996696"/>
+            <a:off x="704088" y="2724912"/>
+            <a:ext cx="5033772" cy="996696"/>
           </a:xfrm>
           <a:prstGeom prst="rect">
             <a:avLst/>
@@ -4266,8 +4266,8 @@
         </p:nvSpPr>
         <p:spPr>
           <a:xfrm>
-            <a:off x="640080" y="3794760"/>
-            <a:ext cx="5161788" cy="457200"/>
+            <a:off x="704088" y="3831336"/>
+            <a:ext cx="5033772" cy="457200"/>
           </a:xfrm>
           <a:prstGeom prst="rect">
             <a:avLst/>
@@ -4305,8 +4305,8 @@
         </p:nvSpPr>
         <p:spPr>
           <a:xfrm>
-            <a:off x="969264" y="4251960"/>
-            <a:ext cx="4832604" cy="457200"/>
+            <a:off x="1033272" y="4288536"/>
+            <a:ext cx="4704588" cy="457200"/>
           </a:xfrm>
           <a:prstGeom prst="rect">
             <a:avLst/>
@@ -4344,8 +4344,8 @@
         </p:nvSpPr>
         <p:spPr>
           <a:xfrm>
-            <a:off x="640080" y="4841748"/>
-            <a:ext cx="5161788" cy="457200"/>
+            <a:off x="704088" y="4841748"/>
+            <a:ext cx="5033772" cy="457200"/>
           </a:xfrm>
           <a:prstGeom prst="rect">
             <a:avLst/>
@@ -4383,8 +4383,8 @@
         </p:nvSpPr>
         <p:spPr>
           <a:xfrm>
-            <a:off x="640080" y="5431536"/>
-            <a:ext cx="5161788" cy="457200"/>
+            <a:off x="704088" y="5394960"/>
+            <a:ext cx="5033772" cy="457200"/>
           </a:xfrm>
           <a:prstGeom prst="rect">
             <a:avLst/>
@@ -4444,8 +4444,8 @@
         </p:nvSpPr>
         <p:spPr>
           <a:xfrm>
-            <a:off x="6387084" y="2688336"/>
-            <a:ext cx="5161788" cy="996696"/>
+            <a:off x="6451092" y="2724912"/>
+            <a:ext cx="5033772" cy="996696"/>
           </a:xfrm>
           <a:prstGeom prst="rect">
             <a:avLst/>
@@ -4500,8 +4500,8 @@
         </p:nvSpPr>
         <p:spPr>
           <a:xfrm>
-            <a:off x="6387084" y="3794760"/>
-            <a:ext cx="5161788" cy="457200"/>
+            <a:off x="6451092" y="3831336"/>
+            <a:ext cx="5033772" cy="457200"/>
           </a:xfrm>
           <a:prstGeom prst="rect">
             <a:avLst/>
@@ -4525,7 +4525,7 @@
                 <a:ea typeface="メイリオ" pitchFamily="34" charset="-122"/>
                 <a:cs typeface="メイリオ" pitchFamily="34" charset="-120"/>
               </a:rPr>
-              <a:t>受容体を刺激し続けて不応にする</a:t>
+              <a:t>受容体を刺激し続けて</a:t>
             </a:r>
             <a:endParaRPr lang="ja-JP" sz="2400" dirty="0"/>
           </a:p>
@@ -4539,8 +4539,8 @@
         </p:nvSpPr>
         <p:spPr>
           <a:xfrm>
-            <a:off x="6387084" y="4384548"/>
-            <a:ext cx="5161788" cy="457200"/>
+            <a:off x="6780276" y="4288536"/>
+            <a:ext cx="4704588" cy="457200"/>
           </a:xfrm>
           <a:prstGeom prst="rect">
             <a:avLst/>
@@ -4564,7 +4564,7 @@
                 <a:ea typeface="メイリオ" pitchFamily="34" charset="-122"/>
                 <a:cs typeface="メイリオ" pitchFamily="34" charset="-120"/>
               </a:rPr>
-              <a:t>最初に筋線維束攣縮</a:t>
+              <a:t>不応にする</a:t>
             </a:r>
             <a:endParaRPr lang="ja-JP" sz="2400" dirty="0"/>
           </a:p>
@@ -4578,8 +4578,47 @@
         </p:nvSpPr>
         <p:spPr>
           <a:xfrm>
-            <a:off x="6387084" y="4974336"/>
-            <a:ext cx="5161788" cy="457200"/>
+            <a:off x="6451092" y="4841748"/>
+            <a:ext cx="5033772" cy="457200"/>
+          </a:xfrm>
+          <a:prstGeom prst="rect">
+            <a:avLst/>
+          </a:prstGeom>
+          <a:noFill/>
+          <a:ln/>
+        </p:spPr>
+        <p:txBody>
+          <a:bodyPr wrap="square" lIns="0" tIns="0" rIns="0" bIns="0" rtlCol="0" anchor="t"/>
+          <a:lstStyle/>
+          <a:p>
+            <a:pPr algn="l" indent="0" marL="0">
+              <a:buNone/>
+            </a:pPr>
+            <a:r>
+              <a:rPr lang="ja-JP" altLang="en-US" sz="2400" dirty="0">
+                <a:solidFill>
+                  <a:srgbClr val="262626"/>
+                </a:solidFill>
+                <a:latin typeface="メイリオ" pitchFamily="34" charset="0"/>
+                <a:ea typeface="メイリオ" pitchFamily="34" charset="-122"/>
+                <a:cs typeface="メイリオ" pitchFamily="34" charset="-120"/>
+              </a:rPr>
+              <a:t>最初に筋線維束攣縮</a:t>
+            </a:r>
+            <a:endParaRPr lang="ja-JP" sz="2400" dirty="0"/>
+          </a:p>
+        </p:txBody>
+      </p:sp>
+      <p:sp>
+        <p:nvSpPr>
+          <p:cNvPr id="23" name="Text 21"/>
+          <p:cNvSpPr txBox="1"/>
+          <p:nvPr/>
+        </p:nvSpPr>
+        <p:spPr>
+          <a:xfrm>
+            <a:off x="6451092" y="5394960"/>
+            <a:ext cx="5033772" cy="457200"/>
           </a:xfrm>
           <a:prstGeom prst="rect">
             <a:avLst/>
@@ -4718,7 +4757,7 @@
           </a:xfrm>
           <a:prstGeom prst="roundRect">
             <a:avLst>
-              <a:gd name="adj" fmla="val 15625"/>
+              <a:gd name="adj" fmla="val 7813"/>
             </a:avLst>
           </a:prstGeom>
           <a:solidFill>
@@ -4727,14 +4766,14 @@
           <a:ln/>
         </p:spPr>
         <p:txBody>
-          <a:bodyPr wrap="square" lIns="0" tIns="0" rIns="0" bIns="0" rtlCol="0" anchor="ctr"/>
+          <a:bodyPr wrap="none" lIns="0" tIns="0" rIns="0" bIns="0" rtlCol="0" anchor="ctr"/>
           <a:lstStyle/>
           <a:p>
             <a:pPr algn="ctr" indent="0" marL="0">
               <a:buNone/>
             </a:pPr>
             <a:r>
-              <a:rPr lang="ja-JP" altLang="en-US" sz="1100" dirty="0">
+              <a:rPr lang="ja-JP" altLang="en-US" sz="1050" dirty="0">
                 <a:solidFill>
                   <a:srgbClr val="404040"/>
                 </a:solidFill>
@@ -4744,7 +4783,7 @@
               </a:rPr>
               <a:t>仕組み</a:t>
             </a:r>
-            <a:endParaRPr lang="ja-JP" sz="1100" dirty="0"/>
+            <a:endParaRPr lang="ja-JP" sz="1050" dirty="0"/>
           </a:p>
         </p:txBody>
       </p:sp>
@@ -4761,7 +4800,7 @@
           </a:xfrm>
           <a:prstGeom prst="roundRect">
             <a:avLst>
-              <a:gd name="adj" fmla="val 15625"/>
+              <a:gd name="adj" fmla="val 7813"/>
             </a:avLst>
           </a:prstGeom>
           <a:solidFill>
@@ -4770,14 +4809,14 @@
           <a:ln/>
         </p:spPr>
         <p:txBody>
-          <a:bodyPr wrap="square" lIns="0" tIns="0" rIns="0" bIns="0" rtlCol="0" anchor="ctr"/>
+          <a:bodyPr wrap="none" lIns="0" tIns="0" rIns="0" bIns="0" rtlCol="0" anchor="ctr"/>
           <a:lstStyle/>
           <a:p>
             <a:pPr algn="ctr" indent="0" marL="0">
               <a:buNone/>
             </a:pPr>
             <a:r>
-              <a:rPr lang="ja-JP" altLang="en-US" sz="1100" b="1" dirty="0">
+              <a:rPr lang="ja-JP" altLang="en-US" sz="1050" b="1" dirty="0">
                 <a:solidFill>
                   <a:srgbClr val="FFFFFF"/>
                 </a:solidFill>
@@ -4787,14 +4826,14 @@
               </a:rPr>
               <a:t>ロクロ</a:t>
             </a:r>
-            <a:endParaRPr lang="ja-JP" sz="1100" dirty="0"/>
+            <a:endParaRPr lang="ja-JP" sz="1050" dirty="0"/>
           </a:p>
           <a:p>
             <a:pPr algn="ctr" indent="0" marL="0">
               <a:buNone/>
             </a:pPr>
             <a:r>
-              <a:rPr lang="ja-JP" altLang="en-US" sz="1100" b="1" dirty="0">
+              <a:rPr lang="ja-JP" altLang="en-US" sz="1050" b="1" dirty="0">
                 <a:solidFill>
                   <a:srgbClr val="FFFFFF"/>
                 </a:solidFill>
@@ -4804,7 +4843,7 @@
               </a:rPr>
               <a:t>ニウム</a:t>
             </a:r>
-            <a:endParaRPr lang="ja-JP" sz="1100" dirty="0"/>
+            <a:endParaRPr lang="ja-JP" sz="1050" dirty="0"/>
           </a:p>
         </p:txBody>
       </p:sp>
@@ -4821,7 +4860,7 @@
           </a:xfrm>
           <a:prstGeom prst="roundRect">
             <a:avLst>
-              <a:gd name="adj" fmla="val 15625"/>
+              <a:gd name="adj" fmla="val 7813"/>
             </a:avLst>
           </a:prstGeom>
           <a:solidFill>
@@ -4830,14 +4869,14 @@
           <a:ln/>
         </p:spPr>
         <p:txBody>
-          <a:bodyPr wrap="square" lIns="0" tIns="0" rIns="0" bIns="0" rtlCol="0" anchor="ctr"/>
+          <a:bodyPr wrap="none" lIns="0" tIns="0" rIns="0" bIns="0" rtlCol="0" anchor="ctr"/>
           <a:lstStyle/>
           <a:p>
             <a:pPr algn="ctr" indent="0" marL="0">
               <a:buNone/>
             </a:pPr>
             <a:r>
-              <a:rPr lang="ja-JP" altLang="en-US" sz="1100" dirty="0">
+              <a:rPr lang="ja-JP" altLang="en-US" sz="1050" dirty="0">
                 <a:solidFill>
                   <a:srgbClr val="404040"/>
                 </a:solidFill>
@@ -4847,14 +4886,14 @@
               </a:rPr>
               <a:t>スキサメ</a:t>
             </a:r>
-            <a:endParaRPr lang="ja-JP" sz="1100" dirty="0"/>
+            <a:endParaRPr lang="ja-JP" sz="1050" dirty="0"/>
           </a:p>
           <a:p>
             <a:pPr algn="ctr" indent="0" marL="0">
               <a:buNone/>
             </a:pPr>
             <a:r>
-              <a:rPr lang="ja-JP" altLang="en-US" sz="1100" dirty="0">
+              <a:rPr lang="ja-JP" altLang="en-US" sz="1050" dirty="0">
                 <a:solidFill>
                   <a:srgbClr val="404040"/>
                 </a:solidFill>
@@ -4864,7 +4903,7 @@
               </a:rPr>
               <a:t>トニウム</a:t>
             </a:r>
-            <a:endParaRPr lang="ja-JP" sz="1100" dirty="0"/>
+            <a:endParaRPr lang="ja-JP" sz="1050" dirty="0"/>
           </a:p>
         </p:txBody>
       </p:sp>
@@ -4881,7 +4920,7 @@
           </a:xfrm>
           <a:prstGeom prst="roundRect">
             <a:avLst>
-              <a:gd name="adj" fmla="val 15625"/>
+              <a:gd name="adj" fmla="val 7813"/>
             </a:avLst>
           </a:prstGeom>
           <a:solidFill>
@@ -4890,14 +4929,14 @@
           <a:ln/>
         </p:spPr>
         <p:txBody>
-          <a:bodyPr wrap="square" lIns="0" tIns="0" rIns="0" bIns="0" rtlCol="0" anchor="ctr"/>
+          <a:bodyPr wrap="none" lIns="0" tIns="0" rIns="0" bIns="0" rtlCol="0" anchor="ctr"/>
           <a:lstStyle/>
           <a:p>
             <a:pPr algn="ctr" indent="0" marL="0">
               <a:buNone/>
             </a:pPr>
             <a:r>
-              <a:rPr lang="ja-JP" altLang="en-US" sz="1100" dirty="0">
+              <a:rPr lang="ja-JP" altLang="en-US" sz="1050" dirty="0">
                 <a:solidFill>
                   <a:srgbClr val="404040"/>
                 </a:solidFill>
@@ -4907,14 +4946,14 @@
               </a:rPr>
               <a:t>重い</a:t>
             </a:r>
-            <a:endParaRPr lang="ja-JP" sz="1100" dirty="0"/>
+            <a:endParaRPr lang="ja-JP" sz="1050" dirty="0"/>
           </a:p>
           <a:p>
             <a:pPr algn="ctr" indent="0" marL="0">
               <a:buNone/>
             </a:pPr>
             <a:r>
-              <a:rPr lang="ja-JP" altLang="en-US" sz="1100" dirty="0">
+              <a:rPr lang="ja-JP" altLang="en-US" sz="1050" dirty="0">
                 <a:solidFill>
                   <a:srgbClr val="404040"/>
                 </a:solidFill>
@@ -4924,7 +4963,7 @@
               </a:rPr>
               <a:t>副作用</a:t>
             </a:r>
-            <a:endParaRPr lang="ja-JP" sz="1100" dirty="0"/>
+            <a:endParaRPr lang="ja-JP" sz="1050" dirty="0"/>
           </a:p>
         </p:txBody>
       </p:sp>
@@ -4941,7 +4980,7 @@
           </a:xfrm>
           <a:prstGeom prst="roundRect">
             <a:avLst>
-              <a:gd name="adj" fmla="val 15625"/>
+              <a:gd name="adj" fmla="val 7813"/>
             </a:avLst>
           </a:prstGeom>
           <a:solidFill>
@@ -4950,14 +4989,14 @@
           <a:ln/>
         </p:spPr>
         <p:txBody>
-          <a:bodyPr wrap="square" lIns="0" tIns="0" rIns="0" bIns="0" rtlCol="0" anchor="ctr"/>
+          <a:bodyPr wrap="none" lIns="0" tIns="0" rIns="0" bIns="0" rtlCol="0" anchor="ctr"/>
           <a:lstStyle/>
           <a:p>
             <a:pPr algn="ctr" indent="0" marL="0">
               <a:buNone/>
             </a:pPr>
             <a:r>
-              <a:rPr lang="ja-JP" altLang="en-US" sz="1100" dirty="0">
+              <a:rPr lang="ja-JP" altLang="en-US" sz="1050" dirty="0">
                 <a:solidFill>
                   <a:srgbClr val="404040"/>
                 </a:solidFill>
@@ -4967,7 +5006,7 @@
               </a:rPr>
               <a:t>使い方</a:t>
             </a:r>
-            <a:endParaRPr lang="ja-JP" sz="1100" dirty="0"/>
+            <a:endParaRPr lang="ja-JP" sz="1050" dirty="0"/>
           </a:p>
         </p:txBody>
       </p:sp>
@@ -5075,11 +5114,11 @@
         <p:spPr>
           <a:xfrm>
             <a:off x="502920" y="1691640"/>
-            <a:ext cx="3869111" cy="4032504"/>
+            <a:ext cx="3676477" cy="4032504"/>
           </a:xfrm>
           <a:prstGeom prst="roundRect">
             <a:avLst>
-              <a:gd name="adj" fmla="val 1891"/>
+              <a:gd name="adj" fmla="val 1990"/>
             </a:avLst>
           </a:prstGeom>
           <a:solidFill>
@@ -5096,8 +5135,8 @@
         </p:nvSpPr>
         <p:spPr>
           <a:xfrm>
-            <a:off x="612648" y="1837944"/>
-            <a:ext cx="3649655" cy="457200"/>
+            <a:off x="704088" y="1837944"/>
+            <a:ext cx="3274141" cy="457200"/>
           </a:xfrm>
           <a:prstGeom prst="rect">
             <a:avLst/>
@@ -5135,8 +5174,8 @@
         </p:nvSpPr>
         <p:spPr>
           <a:xfrm>
-            <a:off x="612648" y="2423160"/>
-            <a:ext cx="3649655" cy="420624"/>
+            <a:off x="704088" y="2423160"/>
+            <a:ext cx="3274141" cy="420624"/>
           </a:xfrm>
           <a:prstGeom prst="rect">
             <a:avLst/>
@@ -5185,8 +5224,8 @@
         </p:nvSpPr>
         <p:spPr>
           <a:xfrm>
-            <a:off x="886968" y="2843784"/>
-            <a:ext cx="3375335" cy="420624"/>
+            <a:off x="978408" y="2843784"/>
+            <a:ext cx="2999821" cy="420624"/>
           </a:xfrm>
           <a:prstGeom prst="rect">
             <a:avLst/>
@@ -5246,8 +5285,8 @@
         </p:nvSpPr>
         <p:spPr>
           <a:xfrm>
-            <a:off x="612648" y="3648456"/>
-            <a:ext cx="3649655" cy="420624"/>
+            <a:off x="704088" y="3648456"/>
+            <a:ext cx="3274141" cy="420624"/>
           </a:xfrm>
           <a:prstGeom prst="rect">
             <a:avLst/>
@@ -5296,8 +5335,8 @@
         </p:nvSpPr>
         <p:spPr>
           <a:xfrm>
-            <a:off x="612648" y="4453128"/>
-            <a:ext cx="3649655" cy="420624"/>
+            <a:off x="704088" y="4453128"/>
+            <a:ext cx="3274141" cy="420624"/>
           </a:xfrm>
           <a:prstGeom prst="rect">
             <a:avLst/>
@@ -5334,6 +5373,34 @@
               </a:rPr>
               <a:t>7 μg/kg/分</a:t>
             </a:r>
+            <a:endParaRPr lang="ja-JP" sz="2200" dirty="0"/>
+          </a:p>
+        </p:txBody>
+      </p:sp>
+      <p:sp>
+        <p:nvSpPr>
+          <p:cNvPr id="17" name="Text 15"/>
+          <p:cNvSpPr txBox="1"/>
+          <p:nvPr/>
+        </p:nvSpPr>
+        <p:spPr>
+          <a:xfrm>
+            <a:off x="978408" y="4873752"/>
+            <a:ext cx="2999821" cy="420624"/>
+          </a:xfrm>
+          <a:prstGeom prst="rect">
+            <a:avLst/>
+          </a:prstGeom>
+          <a:noFill/>
+          <a:ln/>
+        </p:spPr>
+        <p:txBody>
+          <a:bodyPr wrap="square" lIns="0" tIns="0" rIns="0" bIns="0" rtlCol="0" anchor="t"/>
+          <a:lstStyle/>
+          <a:p>
+            <a:pPr algn="l" indent="0" marL="0">
+              <a:buNone/>
+            </a:pPr>
             <a:r>
               <a:rPr lang="ja-JP" altLang="en-US" sz="2200" dirty="0">
                 <a:solidFill>
@@ -5351,18 +5418,18 @@
       </p:sp>
       <p:sp>
         <p:nvSpPr>
-          <p:cNvPr id="17" name="Shape 15"/>
+          <p:cNvPr id="18" name="Shape 16"/>
           <p:cNvSpPr/>
           <p:nvPr/>
         </p:nvSpPr>
         <p:spPr>
           <a:xfrm>
-            <a:off x="4591487" y="1691640"/>
-            <a:ext cx="3437545" cy="4032504"/>
+            <a:off x="4398853" y="1691640"/>
+            <a:ext cx="3533861" cy="4032504"/>
           </a:xfrm>
           <a:prstGeom prst="roundRect">
             <a:avLst>
-              <a:gd name="adj" fmla="val 2128"/>
+              <a:gd name="adj" fmla="val 2070"/>
             </a:avLst>
           </a:prstGeom>
           <a:solidFill>
@@ -5373,53 +5440,14 @@
       </p:sp>
       <p:sp>
         <p:nvSpPr>
-          <p:cNvPr id="18" name="Text 16"/>
-          <p:cNvSpPr txBox="1"/>
-          <p:nvPr/>
-        </p:nvSpPr>
-        <p:spPr>
-          <a:xfrm>
-            <a:off x="4701215" y="1837944"/>
-            <a:ext cx="3218089" cy="457200"/>
-          </a:xfrm>
-          <a:prstGeom prst="rect">
-            <a:avLst/>
-          </a:prstGeom>
-          <a:noFill/>
-          <a:ln/>
-        </p:spPr>
-        <p:txBody>
-          <a:bodyPr wrap="square" lIns="0" tIns="0" rIns="0" bIns="0" rtlCol="0" anchor="t"/>
-          <a:lstStyle/>
-          <a:p>
-            <a:pPr algn="l" indent="0" marL="0">
-              <a:buNone/>
-            </a:pPr>
-            <a:r>
-              <a:rPr lang="ja-JP" altLang="en-US" sz="2400" b="1" dirty="0">
-                <a:solidFill>
-                  <a:srgbClr val="0072B2"/>
-                </a:solidFill>
-                <a:latin typeface="メイリオ" pitchFamily="34" charset="0"/>
-                <a:ea typeface="メイリオ" pitchFamily="34" charset="-122"/>
-                <a:cs typeface="メイリオ" pitchFamily="34" charset="-120"/>
-              </a:rPr>
-              <a:t>時間</a:t>
-            </a:r>
-            <a:endParaRPr lang="ja-JP" sz="2400" dirty="0"/>
-          </a:p>
-        </p:txBody>
-      </p:sp>
-      <p:sp>
-        <p:nvSpPr>
           <p:cNvPr id="19" name="Text 17"/>
           <p:cNvSpPr txBox="1"/>
           <p:nvPr/>
         </p:nvSpPr>
         <p:spPr>
           <a:xfrm>
-            <a:off x="4701215" y="2423160"/>
-            <a:ext cx="3218089" cy="420624"/>
+            <a:off x="4600021" y="1837944"/>
+            <a:ext cx="3131525" cy="457200"/>
           </a:xfrm>
           <a:prstGeom prst="rect">
             <a:avLst/>
@@ -5435,28 +5463,17 @@
               <a:buNone/>
             </a:pPr>
             <a:r>
-              <a:rPr lang="ja-JP" altLang="en-US" sz="2200" dirty="0">
-                <a:solidFill>
-                  <a:srgbClr val="262626"/>
-                </a:solidFill>
-                <a:latin typeface="メイリオ" pitchFamily="34" charset="0"/>
-                <a:ea typeface="メイリオ" pitchFamily="34" charset="-122"/>
-                <a:cs typeface="メイリオ" pitchFamily="34" charset="-120"/>
-              </a:rPr>
-              <a:t>効くまで </a:t>
-            </a:r>
-            <a:r>
-              <a:rPr lang="ja-JP" altLang="en-US" sz="2200" b="1" dirty="0">
-                <a:solidFill>
-                  <a:srgbClr val="262626"/>
-                </a:solidFill>
-                <a:latin typeface="メイリオ" pitchFamily="34" charset="0"/>
-                <a:ea typeface="メイリオ" pitchFamily="34" charset="-122"/>
-                <a:cs typeface="メイリオ" pitchFamily="34" charset="-120"/>
-              </a:rPr>
-              <a:t>1〜2 分</a:t>
-            </a:r>
-            <a:endParaRPr lang="ja-JP" sz="2200" dirty="0"/>
+              <a:rPr lang="ja-JP" altLang="en-US" sz="2400" b="1" dirty="0">
+                <a:solidFill>
+                  <a:srgbClr val="0072B2"/>
+                </a:solidFill>
+                <a:latin typeface="メイリオ" pitchFamily="34" charset="0"/>
+                <a:ea typeface="メイリオ" pitchFamily="34" charset="-122"/>
+                <a:cs typeface="メイリオ" pitchFamily="34" charset="-120"/>
+              </a:rPr>
+              <a:t>時間</a:t>
+            </a:r>
+            <a:endParaRPr lang="ja-JP" sz="2400" dirty="0"/>
           </a:p>
         </p:txBody>
       </p:sp>
@@ -5468,8 +5485,8 @@
         </p:nvSpPr>
         <p:spPr>
           <a:xfrm>
-            <a:off x="4701215" y="3227832"/>
-            <a:ext cx="3218089" cy="420624"/>
+            <a:off x="4600021" y="2423160"/>
+            <a:ext cx="3131525" cy="420624"/>
           </a:xfrm>
           <a:prstGeom prst="rect">
             <a:avLst/>
@@ -5493,7 +5510,7 @@
                 <a:ea typeface="メイリオ" pitchFamily="34" charset="-122"/>
                 <a:cs typeface="メイリオ" pitchFamily="34" charset="-120"/>
               </a:rPr>
-              <a:t>高齢者は</a:t>
+              <a:t>効くまで </a:t>
             </a:r>
             <a:r>
               <a:rPr lang="ja-JP" altLang="en-US" sz="2200" b="1" dirty="0">
@@ -5504,7 +5521,7 @@
                 <a:ea typeface="メイリオ" pitchFamily="34" charset="-122"/>
                 <a:cs typeface="メイリオ" pitchFamily="34" charset="-120"/>
               </a:rPr>
-              <a:t>約 3 分</a:t>
+              <a:t>1〜2 分</a:t>
             </a:r>
             <a:endParaRPr lang="ja-JP" sz="2200" dirty="0"/>
           </a:p>
@@ -5518,8 +5535,8 @@
         </p:nvSpPr>
         <p:spPr>
           <a:xfrm>
-            <a:off x="4701215" y="4032504"/>
-            <a:ext cx="3218089" cy="420624"/>
+            <a:off x="4600021" y="3227832"/>
+            <a:ext cx="3131525" cy="420624"/>
           </a:xfrm>
           <a:prstGeom prst="rect">
             <a:avLst/>
@@ -5543,7 +5560,7 @@
                 <a:ea typeface="メイリオ" pitchFamily="34" charset="-122"/>
                 <a:cs typeface="メイリオ" pitchFamily="34" charset="-120"/>
               </a:rPr>
-              <a:t>持続 </a:t>
+              <a:t>高齢者は</a:t>
             </a:r>
             <a:r>
               <a:rPr lang="ja-JP" altLang="en-US" sz="2200" b="1" dirty="0">
@@ -5554,7 +5571,7 @@
                 <a:ea typeface="メイリオ" pitchFamily="34" charset="-122"/>
                 <a:cs typeface="メイリオ" pitchFamily="34" charset="-120"/>
               </a:rPr>
-              <a:t>30〜60 分</a:t>
+              <a:t>約 3 分</a:t>
             </a:r>
             <a:endParaRPr lang="ja-JP" sz="2200" dirty="0"/>
           </a:p>
@@ -5568,8 +5585,8 @@
         </p:nvSpPr>
         <p:spPr>
           <a:xfrm>
-            <a:off x="4701215" y="4837176"/>
-            <a:ext cx="3218089" cy="420624"/>
+            <a:off x="4600021" y="4032504"/>
+            <a:ext cx="3131525" cy="420624"/>
           </a:xfrm>
           <a:prstGeom prst="rect">
             <a:avLst/>
@@ -5593,6 +5610,56 @@
                 <a:ea typeface="メイリオ" pitchFamily="34" charset="-122"/>
                 <a:cs typeface="メイリオ" pitchFamily="34" charset="-120"/>
               </a:rPr>
+              <a:t>持続 </a:t>
+            </a:r>
+            <a:r>
+              <a:rPr lang="ja-JP" altLang="en-US" sz="2200" b="1" dirty="0">
+                <a:solidFill>
+                  <a:srgbClr val="262626"/>
+                </a:solidFill>
+                <a:latin typeface="メイリオ" pitchFamily="34" charset="0"/>
+                <a:ea typeface="メイリオ" pitchFamily="34" charset="-122"/>
+                <a:cs typeface="メイリオ" pitchFamily="34" charset="-120"/>
+              </a:rPr>
+              <a:t>30〜60 分</a:t>
+            </a:r>
+            <a:endParaRPr lang="ja-JP" sz="2200" dirty="0"/>
+          </a:p>
+        </p:txBody>
+      </p:sp>
+      <p:sp>
+        <p:nvSpPr>
+          <p:cNvPr id="23" name="Text 21"/>
+          <p:cNvSpPr txBox="1"/>
+          <p:nvPr/>
+        </p:nvSpPr>
+        <p:spPr>
+          <a:xfrm>
+            <a:off x="4600021" y="4837176"/>
+            <a:ext cx="3131525" cy="420624"/>
+          </a:xfrm>
+          <a:prstGeom prst="rect">
+            <a:avLst/>
+          </a:prstGeom>
+          <a:noFill/>
+          <a:ln/>
+        </p:spPr>
+        <p:txBody>
+          <a:bodyPr wrap="square" lIns="0" tIns="0" rIns="0" bIns="0" rtlCol="0" anchor="t"/>
+          <a:lstStyle/>
+          <a:p>
+            <a:pPr algn="l" indent="0" marL="0">
+              <a:buNone/>
+            </a:pPr>
+            <a:r>
+              <a:rPr lang="ja-JP" altLang="en-US" sz="2200" dirty="0">
+                <a:solidFill>
+                  <a:srgbClr val="262626"/>
+                </a:solidFill>
+                <a:latin typeface="メイリオ" pitchFamily="34" charset="0"/>
+                <a:ea typeface="メイリオ" pitchFamily="34" charset="-122"/>
+                <a:cs typeface="メイリオ" pitchFamily="34" charset="-120"/>
+              </a:rPr>
               <a:t>高齢・吸入麻酔で延長</a:t>
             </a:r>
             <a:endParaRPr lang="ja-JP" sz="2200" dirty="0"/>
@@ -5601,18 +5668,18 @@
       </p:sp>
       <p:sp>
         <p:nvSpPr>
-          <p:cNvPr id="23" name="Shape 21"/>
+          <p:cNvPr id="24" name="Shape 22"/>
           <p:cNvSpPr/>
           <p:nvPr/>
         </p:nvSpPr>
         <p:spPr>
           <a:xfrm>
-            <a:off x="8248487" y="1691640"/>
-            <a:ext cx="3437545" cy="4032504"/>
+            <a:off x="8152171" y="1691640"/>
+            <a:ext cx="3533861" cy="4032504"/>
           </a:xfrm>
           <a:prstGeom prst="roundRect">
             <a:avLst>
-              <a:gd name="adj" fmla="val 2128"/>
+              <a:gd name="adj" fmla="val 2070"/>
             </a:avLst>
           </a:prstGeom>
           <a:solidFill>
@@ -5623,53 +5690,14 @@
       </p:sp>
       <p:sp>
         <p:nvSpPr>
-          <p:cNvPr id="24" name="Text 22"/>
-          <p:cNvSpPr txBox="1"/>
-          <p:nvPr/>
-        </p:nvSpPr>
-        <p:spPr>
-          <a:xfrm>
-            <a:off x="8358215" y="1837944"/>
-            <a:ext cx="3218089" cy="457200"/>
-          </a:xfrm>
-          <a:prstGeom prst="rect">
-            <a:avLst/>
-          </a:prstGeom>
-          <a:noFill/>
-          <a:ln/>
-        </p:spPr>
-        <p:txBody>
-          <a:bodyPr wrap="square" lIns="0" tIns="0" rIns="0" bIns="0" rtlCol="0" anchor="t"/>
-          <a:lstStyle/>
-          <a:p>
-            <a:pPr algn="l" indent="0" marL="0">
-              <a:buNone/>
-            </a:pPr>
-            <a:r>
-              <a:rPr lang="ja-JP" altLang="en-US" sz="2400" b="1" dirty="0">
-                <a:solidFill>
-                  <a:srgbClr val="D55E00"/>
-                </a:solidFill>
-                <a:latin typeface="メイリオ" pitchFamily="34" charset="0"/>
-                <a:ea typeface="メイリオ" pitchFamily="34" charset="-122"/>
-                <a:cs typeface="メイリオ" pitchFamily="34" charset="-120"/>
-              </a:rPr>
-              <a:t>注意</a:t>
-            </a:r>
-            <a:endParaRPr lang="ja-JP" sz="2400" dirty="0"/>
-          </a:p>
-        </p:txBody>
-      </p:sp>
-      <p:sp>
-        <p:nvSpPr>
           <p:cNvPr id="25" name="Text 23"/>
           <p:cNvSpPr txBox="1"/>
           <p:nvPr/>
         </p:nvSpPr>
         <p:spPr>
           <a:xfrm>
-            <a:off x="8358215" y="2423160"/>
-            <a:ext cx="3218089" cy="420624"/>
+            <a:off x="8353339" y="1837944"/>
+            <a:ext cx="3131525" cy="457200"/>
           </a:xfrm>
           <a:prstGeom prst="rect">
             <a:avLst/>
@@ -5685,17 +5713,17 @@
               <a:buNone/>
             </a:pPr>
             <a:r>
-              <a:rPr lang="ja-JP" altLang="en-US" sz="2200" dirty="0">
-                <a:solidFill>
-                  <a:srgbClr val="262626"/>
-                </a:solidFill>
-                <a:latin typeface="メイリオ" pitchFamily="34" charset="0"/>
-                <a:ea typeface="メイリオ" pitchFamily="34" charset="-122"/>
-                <a:cs typeface="メイリオ" pitchFamily="34" charset="-120"/>
-              </a:rPr>
-              <a:t>注射時の痛み</a:t>
-            </a:r>
-            <a:endParaRPr lang="ja-JP" sz="2200" dirty="0"/>
+              <a:rPr lang="ja-JP" altLang="en-US" sz="2400" b="1" dirty="0">
+                <a:solidFill>
+                  <a:srgbClr val="D55E00"/>
+                </a:solidFill>
+                <a:latin typeface="メイリオ" pitchFamily="34" charset="0"/>
+                <a:ea typeface="メイリオ" pitchFamily="34" charset="-122"/>
+                <a:cs typeface="メイリオ" pitchFamily="34" charset="-120"/>
+              </a:rPr>
+              <a:t>注意</a:t>
+            </a:r>
+            <a:endParaRPr lang="ja-JP" sz="2400" dirty="0"/>
           </a:p>
         </p:txBody>
       </p:sp>
@@ -5707,8 +5735,8 @@
         </p:nvSpPr>
         <p:spPr>
           <a:xfrm>
-            <a:off x="8358215" y="3227832"/>
-            <a:ext cx="3218089" cy="420624"/>
+            <a:off x="8353339" y="2423160"/>
+            <a:ext cx="3131525" cy="420624"/>
           </a:xfrm>
           <a:prstGeom prst="rect">
             <a:avLst/>
@@ -5732,7 +5760,7 @@
                 <a:ea typeface="メイリオ" pitchFamily="34" charset="-122"/>
                 <a:cs typeface="メイリオ" pitchFamily="34" charset="-120"/>
               </a:rPr>
-              <a:t>未変化体で胆汁・尿へ</a:t>
+              <a:t>注射時の痛み</a:t>
             </a:r>
             <a:endParaRPr lang="ja-JP" sz="2200" dirty="0"/>
           </a:p>
@@ -5746,8 +5774,8 @@
         </p:nvSpPr>
         <p:spPr>
           <a:xfrm>
-            <a:off x="8358215" y="4032504"/>
-            <a:ext cx="3218089" cy="420624"/>
+            <a:off x="8353339" y="3227832"/>
+            <a:ext cx="3131525" cy="420624"/>
           </a:xfrm>
           <a:prstGeom prst="rect">
             <a:avLst/>
@@ -5771,7 +5799,7 @@
                 <a:ea typeface="メイリオ" pitchFamily="34" charset="-122"/>
                 <a:cs typeface="メイリオ" pitchFamily="34" charset="-120"/>
               </a:rPr>
-              <a:t>肝腎障害・高齢で遷延</a:t>
+              <a:t>未変化体で胆汁・尿へ</a:t>
             </a:r>
             <a:endParaRPr lang="ja-JP" sz="2200" dirty="0"/>
           </a:p>
@@ -5785,8 +5813,47 @@
         </p:nvSpPr>
         <p:spPr>
           <a:xfrm>
-            <a:off x="8358215" y="4837176"/>
-            <a:ext cx="3218089" cy="420624"/>
+            <a:off x="8353339" y="4032504"/>
+            <a:ext cx="3131525" cy="420624"/>
+          </a:xfrm>
+          <a:prstGeom prst="rect">
+            <a:avLst/>
+          </a:prstGeom>
+          <a:noFill/>
+          <a:ln/>
+        </p:spPr>
+        <p:txBody>
+          <a:bodyPr wrap="square" lIns="0" tIns="0" rIns="0" bIns="0" rtlCol="0" anchor="t"/>
+          <a:lstStyle/>
+          <a:p>
+            <a:pPr algn="l" indent="0" marL="0">
+              <a:buNone/>
+            </a:pPr>
+            <a:r>
+              <a:rPr lang="ja-JP" altLang="en-US" sz="2200" dirty="0">
+                <a:solidFill>
+                  <a:srgbClr val="262626"/>
+                </a:solidFill>
+                <a:latin typeface="メイリオ" pitchFamily="34" charset="0"/>
+                <a:ea typeface="メイリオ" pitchFamily="34" charset="-122"/>
+                <a:cs typeface="メイリオ" pitchFamily="34" charset="-120"/>
+              </a:rPr>
+              <a:t>肝腎障害・高齢で遷延</a:t>
+            </a:r>
+            <a:endParaRPr lang="ja-JP" sz="2200" dirty="0"/>
+          </a:p>
+        </p:txBody>
+      </p:sp>
+      <p:sp>
+        <p:nvSpPr>
+          <p:cNvPr id="29" name="Text 27"/>
+          <p:cNvSpPr txBox="1"/>
+          <p:nvPr/>
+        </p:nvSpPr>
+        <p:spPr>
+          <a:xfrm>
+            <a:off x="8353339" y="4837176"/>
+            <a:ext cx="3131525" cy="420624"/>
           </a:xfrm>
           <a:prstGeom prst="rect">
             <a:avLst/>
@@ -5925,7 +5992,7 @@
           </a:xfrm>
           <a:prstGeom prst="roundRect">
             <a:avLst>
-              <a:gd name="adj" fmla="val 15625"/>
+              <a:gd name="adj" fmla="val 7813"/>
             </a:avLst>
           </a:prstGeom>
           <a:solidFill>
@@ -5934,14 +6001,14 @@
           <a:ln/>
         </p:spPr>
         <p:txBody>
-          <a:bodyPr wrap="square" lIns="0" tIns="0" rIns="0" bIns="0" rtlCol="0" anchor="ctr"/>
+          <a:bodyPr wrap="none" lIns="0" tIns="0" rIns="0" bIns="0" rtlCol="0" anchor="ctr"/>
           <a:lstStyle/>
           <a:p>
             <a:pPr algn="ctr" indent="0" marL="0">
               <a:buNone/>
             </a:pPr>
             <a:r>
-              <a:rPr lang="ja-JP" altLang="en-US" sz="1100" dirty="0">
+              <a:rPr lang="ja-JP" altLang="en-US" sz="1050" dirty="0">
                 <a:solidFill>
                   <a:srgbClr val="404040"/>
                 </a:solidFill>
@@ -5951,7 +6018,7 @@
               </a:rPr>
               <a:t>仕組み</a:t>
             </a:r>
-            <a:endParaRPr lang="ja-JP" sz="1100" dirty="0"/>
+            <a:endParaRPr lang="ja-JP" sz="1050" dirty="0"/>
           </a:p>
         </p:txBody>
       </p:sp>
@@ -5968,7 +6035,7 @@
           </a:xfrm>
           <a:prstGeom prst="roundRect">
             <a:avLst>
-              <a:gd name="adj" fmla="val 15625"/>
+              <a:gd name="adj" fmla="val 7813"/>
             </a:avLst>
           </a:prstGeom>
           <a:solidFill>
@@ -5977,14 +6044,14 @@
           <a:ln/>
         </p:spPr>
         <p:txBody>
-          <a:bodyPr wrap="square" lIns="0" tIns="0" rIns="0" bIns="0" rtlCol="0" anchor="ctr"/>
+          <a:bodyPr wrap="none" lIns="0" tIns="0" rIns="0" bIns="0" rtlCol="0" anchor="ctr"/>
           <a:lstStyle/>
           <a:p>
             <a:pPr algn="ctr" indent="0" marL="0">
               <a:buNone/>
             </a:pPr>
             <a:r>
-              <a:rPr lang="ja-JP" altLang="en-US" sz="1100" b="1" dirty="0">
+              <a:rPr lang="ja-JP" altLang="en-US" sz="1050" b="1" dirty="0">
                 <a:solidFill>
                   <a:srgbClr val="FFFFFF"/>
                 </a:solidFill>
@@ -5994,14 +6061,14 @@
               </a:rPr>
               <a:t>ロクロ</a:t>
             </a:r>
-            <a:endParaRPr lang="ja-JP" sz="1100" dirty="0"/>
+            <a:endParaRPr lang="ja-JP" sz="1050" dirty="0"/>
           </a:p>
           <a:p>
             <a:pPr algn="ctr" indent="0" marL="0">
               <a:buNone/>
             </a:pPr>
             <a:r>
-              <a:rPr lang="ja-JP" altLang="en-US" sz="1100" b="1" dirty="0">
+              <a:rPr lang="ja-JP" altLang="en-US" sz="1050" b="1" dirty="0">
                 <a:solidFill>
                   <a:srgbClr val="FFFFFF"/>
                 </a:solidFill>
@@ -6011,7 +6078,7 @@
               </a:rPr>
               <a:t>ニウム</a:t>
             </a:r>
-            <a:endParaRPr lang="ja-JP" sz="1100" dirty="0"/>
+            <a:endParaRPr lang="ja-JP" sz="1050" dirty="0"/>
           </a:p>
         </p:txBody>
       </p:sp>
@@ -6028,7 +6095,7 @@
           </a:xfrm>
           <a:prstGeom prst="roundRect">
             <a:avLst>
-              <a:gd name="adj" fmla="val 15625"/>
+              <a:gd name="adj" fmla="val 7813"/>
             </a:avLst>
           </a:prstGeom>
           <a:solidFill>
@@ -6037,14 +6104,14 @@
           <a:ln/>
         </p:spPr>
         <p:txBody>
-          <a:bodyPr wrap="square" lIns="0" tIns="0" rIns="0" bIns="0" rtlCol="0" anchor="ctr"/>
+          <a:bodyPr wrap="none" lIns="0" tIns="0" rIns="0" bIns="0" rtlCol="0" anchor="ctr"/>
           <a:lstStyle/>
           <a:p>
             <a:pPr algn="ctr" indent="0" marL="0">
               <a:buNone/>
             </a:pPr>
             <a:r>
-              <a:rPr lang="ja-JP" altLang="en-US" sz="1100" dirty="0">
+              <a:rPr lang="ja-JP" altLang="en-US" sz="1050" dirty="0">
                 <a:solidFill>
                   <a:srgbClr val="404040"/>
                 </a:solidFill>
@@ -6054,14 +6121,14 @@
               </a:rPr>
               <a:t>スキサメ</a:t>
             </a:r>
-            <a:endParaRPr lang="ja-JP" sz="1100" dirty="0"/>
+            <a:endParaRPr lang="ja-JP" sz="1050" dirty="0"/>
           </a:p>
           <a:p>
             <a:pPr algn="ctr" indent="0" marL="0">
               <a:buNone/>
             </a:pPr>
             <a:r>
-              <a:rPr lang="ja-JP" altLang="en-US" sz="1100" dirty="0">
+              <a:rPr lang="ja-JP" altLang="en-US" sz="1050" dirty="0">
                 <a:solidFill>
                   <a:srgbClr val="404040"/>
                 </a:solidFill>
@@ -6071,7 +6138,7 @@
               </a:rPr>
               <a:t>トニウム</a:t>
             </a:r>
-            <a:endParaRPr lang="ja-JP" sz="1100" dirty="0"/>
+            <a:endParaRPr lang="ja-JP" sz="1050" dirty="0"/>
           </a:p>
         </p:txBody>
       </p:sp>
@@ -6088,7 +6155,7 @@
           </a:xfrm>
           <a:prstGeom prst="roundRect">
             <a:avLst>
-              <a:gd name="adj" fmla="val 15625"/>
+              <a:gd name="adj" fmla="val 7813"/>
             </a:avLst>
           </a:prstGeom>
           <a:solidFill>
@@ -6097,14 +6164,14 @@
           <a:ln/>
         </p:spPr>
         <p:txBody>
-          <a:bodyPr wrap="square" lIns="0" tIns="0" rIns="0" bIns="0" rtlCol="0" anchor="ctr"/>
+          <a:bodyPr wrap="none" lIns="0" tIns="0" rIns="0" bIns="0" rtlCol="0" anchor="ctr"/>
           <a:lstStyle/>
           <a:p>
             <a:pPr algn="ctr" indent="0" marL="0">
               <a:buNone/>
             </a:pPr>
             <a:r>
-              <a:rPr lang="ja-JP" altLang="en-US" sz="1100" dirty="0">
+              <a:rPr lang="ja-JP" altLang="en-US" sz="1050" dirty="0">
                 <a:solidFill>
                   <a:srgbClr val="404040"/>
                 </a:solidFill>
@@ -6114,14 +6181,14 @@
               </a:rPr>
               <a:t>重い</a:t>
             </a:r>
-            <a:endParaRPr lang="ja-JP" sz="1100" dirty="0"/>
+            <a:endParaRPr lang="ja-JP" sz="1050" dirty="0"/>
           </a:p>
           <a:p>
             <a:pPr algn="ctr" indent="0" marL="0">
               <a:buNone/>
             </a:pPr>
             <a:r>
-              <a:rPr lang="ja-JP" altLang="en-US" sz="1100" dirty="0">
+              <a:rPr lang="ja-JP" altLang="en-US" sz="1050" dirty="0">
                 <a:solidFill>
                   <a:srgbClr val="404040"/>
                 </a:solidFill>
@@ -6131,7 +6198,7 @@
               </a:rPr>
               <a:t>副作用</a:t>
             </a:r>
-            <a:endParaRPr lang="ja-JP" sz="1100" dirty="0"/>
+            <a:endParaRPr lang="ja-JP" sz="1050" dirty="0"/>
           </a:p>
         </p:txBody>
       </p:sp>
@@ -6148,7 +6215,7 @@
           </a:xfrm>
           <a:prstGeom prst="roundRect">
             <a:avLst>
-              <a:gd name="adj" fmla="val 15625"/>
+              <a:gd name="adj" fmla="val 7813"/>
             </a:avLst>
           </a:prstGeom>
           <a:solidFill>
@@ -6157,14 +6224,14 @@
           <a:ln/>
         </p:spPr>
         <p:txBody>
-          <a:bodyPr wrap="square" lIns="0" tIns="0" rIns="0" bIns="0" rtlCol="0" anchor="ctr"/>
+          <a:bodyPr wrap="none" lIns="0" tIns="0" rIns="0" bIns="0" rtlCol="0" anchor="ctr"/>
           <a:lstStyle/>
           <a:p>
             <a:pPr algn="ctr" indent="0" marL="0">
               <a:buNone/>
             </a:pPr>
             <a:r>
-              <a:rPr lang="ja-JP" altLang="en-US" sz="1100" dirty="0">
+              <a:rPr lang="ja-JP" altLang="en-US" sz="1050" dirty="0">
                 <a:solidFill>
                   <a:srgbClr val="404040"/>
                 </a:solidFill>
@@ -6174,7 +6241,7 @@
               </a:rPr>
               <a:t>使い方</a:t>
             </a:r>
-            <a:endParaRPr lang="ja-JP" sz="1100" dirty="0"/>
+            <a:endParaRPr lang="ja-JP" sz="1050" dirty="0"/>
           </a:p>
         </p:txBody>
       </p:sp>
@@ -6831,7 +6898,7 @@
           </a:xfrm>
           <a:prstGeom prst="roundRect">
             <a:avLst>
-              <a:gd name="adj" fmla="val 15625"/>
+              <a:gd name="adj" fmla="val 7813"/>
             </a:avLst>
           </a:prstGeom>
           <a:solidFill>
@@ -6840,14 +6907,14 @@
           <a:ln/>
         </p:spPr>
         <p:txBody>
-          <a:bodyPr wrap="square" lIns="0" tIns="0" rIns="0" bIns="0" rtlCol="0" anchor="ctr"/>
+          <a:bodyPr wrap="none" lIns="0" tIns="0" rIns="0" bIns="0" rtlCol="0" anchor="ctr"/>
           <a:lstStyle/>
           <a:p>
             <a:pPr algn="ctr" indent="0" marL="0">
               <a:buNone/>
             </a:pPr>
             <a:r>
-              <a:rPr lang="ja-JP" altLang="en-US" sz="1100" dirty="0">
+              <a:rPr lang="ja-JP" altLang="en-US" sz="1050" dirty="0">
                 <a:solidFill>
                   <a:srgbClr val="404040"/>
                 </a:solidFill>
@@ -6857,7 +6924,7 @@
               </a:rPr>
               <a:t>仕組み</a:t>
             </a:r>
-            <a:endParaRPr lang="ja-JP" sz="1100" dirty="0"/>
+            <a:endParaRPr lang="ja-JP" sz="1050" dirty="0"/>
           </a:p>
         </p:txBody>
       </p:sp>
@@ -6874,7 +6941,7 @@
           </a:xfrm>
           <a:prstGeom prst="roundRect">
             <a:avLst>
-              <a:gd name="adj" fmla="val 15625"/>
+              <a:gd name="adj" fmla="val 7813"/>
             </a:avLst>
           </a:prstGeom>
           <a:solidFill>
@@ -6883,14 +6950,14 @@
           <a:ln/>
         </p:spPr>
         <p:txBody>
-          <a:bodyPr wrap="square" lIns="0" tIns="0" rIns="0" bIns="0" rtlCol="0" anchor="ctr"/>
+          <a:bodyPr wrap="none" lIns="0" tIns="0" rIns="0" bIns="0" rtlCol="0" anchor="ctr"/>
           <a:lstStyle/>
           <a:p>
             <a:pPr algn="ctr" indent="0" marL="0">
               <a:buNone/>
             </a:pPr>
             <a:r>
-              <a:rPr lang="ja-JP" altLang="en-US" sz="1100" dirty="0">
+              <a:rPr lang="ja-JP" altLang="en-US" sz="1050" dirty="0">
                 <a:solidFill>
                   <a:srgbClr val="404040"/>
                 </a:solidFill>
@@ -6900,14 +6967,14 @@
               </a:rPr>
               <a:t>ロクロ</a:t>
             </a:r>
-            <a:endParaRPr lang="ja-JP" sz="1100" dirty="0"/>
+            <a:endParaRPr lang="ja-JP" sz="1050" dirty="0"/>
           </a:p>
           <a:p>
             <a:pPr algn="ctr" indent="0" marL="0">
               <a:buNone/>
             </a:pPr>
             <a:r>
-              <a:rPr lang="ja-JP" altLang="en-US" sz="1100" dirty="0">
+              <a:rPr lang="ja-JP" altLang="en-US" sz="1050" dirty="0">
                 <a:solidFill>
                   <a:srgbClr val="404040"/>
                 </a:solidFill>
@@ -6917,7 +6984,7 @@
               </a:rPr>
               <a:t>ニウム</a:t>
             </a:r>
-            <a:endParaRPr lang="ja-JP" sz="1100" dirty="0"/>
+            <a:endParaRPr lang="ja-JP" sz="1050" dirty="0"/>
           </a:p>
         </p:txBody>
       </p:sp>
@@ -6934,7 +7001,7 @@
           </a:xfrm>
           <a:prstGeom prst="roundRect">
             <a:avLst>
-              <a:gd name="adj" fmla="val 15625"/>
+              <a:gd name="adj" fmla="val 7813"/>
             </a:avLst>
           </a:prstGeom>
           <a:solidFill>
@@ -6943,14 +7010,14 @@
           <a:ln/>
         </p:spPr>
         <p:txBody>
-          <a:bodyPr wrap="square" lIns="0" tIns="0" rIns="0" bIns="0" rtlCol="0" anchor="ctr"/>
+          <a:bodyPr wrap="none" lIns="0" tIns="0" rIns="0" bIns="0" rtlCol="0" anchor="ctr"/>
           <a:lstStyle/>
           <a:p>
             <a:pPr algn="ctr" indent="0" marL="0">
               <a:buNone/>
             </a:pPr>
             <a:r>
-              <a:rPr lang="ja-JP" altLang="en-US" sz="1100" b="1" dirty="0">
+              <a:rPr lang="ja-JP" altLang="en-US" sz="1050" b="1" dirty="0">
                 <a:solidFill>
                   <a:srgbClr val="FFFFFF"/>
                 </a:solidFill>
@@ -6960,14 +7027,14 @@
               </a:rPr>
               <a:t>スキサメ</a:t>
             </a:r>
-            <a:endParaRPr lang="ja-JP" sz="1100" dirty="0"/>
+            <a:endParaRPr lang="ja-JP" sz="1050" dirty="0"/>
           </a:p>
           <a:p>
             <a:pPr algn="ctr" indent="0" marL="0">
               <a:buNone/>
             </a:pPr>
             <a:r>
-              <a:rPr lang="ja-JP" altLang="en-US" sz="1100" b="1" dirty="0">
+              <a:rPr lang="ja-JP" altLang="en-US" sz="1050" b="1" dirty="0">
                 <a:solidFill>
                   <a:srgbClr val="FFFFFF"/>
                 </a:solidFill>
@@ -6977,7 +7044,7 @@
               </a:rPr>
               <a:t>トニウム</a:t>
             </a:r>
-            <a:endParaRPr lang="ja-JP" sz="1100" dirty="0"/>
+            <a:endParaRPr lang="ja-JP" sz="1050" dirty="0"/>
           </a:p>
         </p:txBody>
       </p:sp>
@@ -6994,7 +7061,7 @@
           </a:xfrm>
           <a:prstGeom prst="roundRect">
             <a:avLst>
-              <a:gd name="adj" fmla="val 15625"/>
+              <a:gd name="adj" fmla="val 7813"/>
             </a:avLst>
           </a:prstGeom>
           <a:solidFill>
@@ -7003,14 +7070,14 @@
           <a:ln/>
         </p:spPr>
         <p:txBody>
-          <a:bodyPr wrap="square" lIns="0" tIns="0" rIns="0" bIns="0" rtlCol="0" anchor="ctr"/>
+          <a:bodyPr wrap="none" lIns="0" tIns="0" rIns="0" bIns="0" rtlCol="0" anchor="ctr"/>
           <a:lstStyle/>
           <a:p>
             <a:pPr algn="ctr" indent="0" marL="0">
               <a:buNone/>
             </a:pPr>
             <a:r>
-              <a:rPr lang="ja-JP" altLang="en-US" sz="1100" dirty="0">
+              <a:rPr lang="ja-JP" altLang="en-US" sz="1050" dirty="0">
                 <a:solidFill>
                   <a:srgbClr val="404040"/>
                 </a:solidFill>
@@ -7020,14 +7087,14 @@
               </a:rPr>
               <a:t>重い</a:t>
             </a:r>
-            <a:endParaRPr lang="ja-JP" sz="1100" dirty="0"/>
+            <a:endParaRPr lang="ja-JP" sz="1050" dirty="0"/>
           </a:p>
           <a:p>
             <a:pPr algn="ctr" indent="0" marL="0">
               <a:buNone/>
             </a:pPr>
             <a:r>
-              <a:rPr lang="ja-JP" altLang="en-US" sz="1100" dirty="0">
+              <a:rPr lang="ja-JP" altLang="en-US" sz="1050" dirty="0">
                 <a:solidFill>
                   <a:srgbClr val="404040"/>
                 </a:solidFill>
@@ -7037,7 +7104,7 @@
               </a:rPr>
               <a:t>副作用</a:t>
             </a:r>
-            <a:endParaRPr lang="ja-JP" sz="1100" dirty="0"/>
+            <a:endParaRPr lang="ja-JP" sz="1050" dirty="0"/>
           </a:p>
         </p:txBody>
       </p:sp>
@@ -7054,7 +7121,7 @@
           </a:xfrm>
           <a:prstGeom prst="roundRect">
             <a:avLst>
-              <a:gd name="adj" fmla="val 15625"/>
+              <a:gd name="adj" fmla="val 7813"/>
             </a:avLst>
           </a:prstGeom>
           <a:solidFill>
@@ -7063,14 +7130,14 @@
           <a:ln/>
         </p:spPr>
         <p:txBody>
-          <a:bodyPr wrap="square" lIns="0" tIns="0" rIns="0" bIns="0" rtlCol="0" anchor="ctr"/>
+          <a:bodyPr wrap="none" lIns="0" tIns="0" rIns="0" bIns="0" rtlCol="0" anchor="ctr"/>
           <a:lstStyle/>
           <a:p>
             <a:pPr algn="ctr" indent="0" marL="0">
               <a:buNone/>
             </a:pPr>
             <a:r>
-              <a:rPr lang="ja-JP" altLang="en-US" sz="1100" dirty="0">
+              <a:rPr lang="ja-JP" altLang="en-US" sz="1050" dirty="0">
                 <a:solidFill>
                   <a:srgbClr val="404040"/>
                 </a:solidFill>
@@ -7080,7 +7147,7 @@
               </a:rPr>
               <a:t>使い方</a:t>
             </a:r>
-            <a:endParaRPr lang="ja-JP" sz="1100" dirty="0"/>
+            <a:endParaRPr lang="ja-JP" sz="1050" dirty="0"/>
           </a:p>
         </p:txBody>
       </p:sp>
@@ -7188,11 +7255,11 @@
         <p:spPr>
           <a:xfrm>
             <a:off x="502920" y="1691640"/>
-            <a:ext cx="3384347" cy="4032504"/>
+            <a:ext cx="3520013" cy="4032504"/>
           </a:xfrm>
           <a:prstGeom prst="roundRect">
             <a:avLst>
-              <a:gd name="adj" fmla="val 2161"/>
+              <a:gd name="adj" fmla="val 2078"/>
             </a:avLst>
           </a:prstGeom>
           <a:solidFill>
@@ -7209,8 +7276,8 @@
         </p:nvSpPr>
         <p:spPr>
           <a:xfrm>
-            <a:off x="612648" y="1837944"/>
-            <a:ext cx="3164891" cy="457200"/>
+            <a:off x="704088" y="1837944"/>
+            <a:ext cx="3117677" cy="457200"/>
           </a:xfrm>
           <a:prstGeom prst="rect">
             <a:avLst/>
@@ -7248,8 +7315,8 @@
         </p:nvSpPr>
         <p:spPr>
           <a:xfrm>
-            <a:off x="612648" y="2423160"/>
-            <a:ext cx="3164891" cy="420624"/>
+            <a:off x="704088" y="2423160"/>
+            <a:ext cx="3117677" cy="420624"/>
           </a:xfrm>
           <a:prstGeom prst="rect">
             <a:avLst/>
@@ -7309,8 +7376,8 @@
         </p:nvSpPr>
         <p:spPr>
           <a:xfrm>
-            <a:off x="886968" y="2843784"/>
-            <a:ext cx="2890571" cy="420624"/>
+            <a:off x="978408" y="2843784"/>
+            <a:ext cx="2843357" cy="420624"/>
           </a:xfrm>
           <a:prstGeom prst="rect">
             <a:avLst/>
@@ -7348,8 +7415,8 @@
         </p:nvSpPr>
         <p:spPr>
           <a:xfrm>
-            <a:off x="612648" y="3614928"/>
-            <a:ext cx="3164891" cy="420624"/>
+            <a:off x="704088" y="3614928"/>
+            <a:ext cx="3117677" cy="420624"/>
           </a:xfrm>
           <a:prstGeom prst="rect">
             <a:avLst/>
@@ -7398,8 +7465,8 @@
         </p:nvSpPr>
         <p:spPr>
           <a:xfrm>
-            <a:off x="612648" y="4386072"/>
-            <a:ext cx="3164891" cy="420624"/>
+            <a:off x="704088" y="4386072"/>
+            <a:ext cx="3117677" cy="420624"/>
           </a:xfrm>
           <a:prstGeom prst="rect">
             <a:avLst/>
@@ -7437,12 +7504,12 @@
         </p:nvSpPr>
         <p:spPr>
           <a:xfrm>
-            <a:off x="4106723" y="1691640"/>
-            <a:ext cx="3975506" cy="4032504"/>
+            <a:off x="4242389" y="1691640"/>
+            <a:ext cx="3845458" cy="4032504"/>
           </a:xfrm>
           <a:prstGeom prst="roundRect">
             <a:avLst>
-              <a:gd name="adj" fmla="val 1840"/>
+              <a:gd name="adj" fmla="val 1902"/>
             </a:avLst>
           </a:prstGeom>
           <a:solidFill>
@@ -7459,8 +7526,8 @@
         </p:nvSpPr>
         <p:spPr>
           <a:xfrm>
-            <a:off x="4216451" y="1837944"/>
-            <a:ext cx="3756050" cy="457200"/>
+            <a:off x="4443557" y="1837944"/>
+            <a:ext cx="3443122" cy="457200"/>
           </a:xfrm>
           <a:prstGeom prst="rect">
             <a:avLst/>
@@ -7498,8 +7565,8 @@
         </p:nvSpPr>
         <p:spPr>
           <a:xfrm>
-            <a:off x="4216451" y="2423160"/>
-            <a:ext cx="3756050" cy="420624"/>
+            <a:off x="4443557" y="2423160"/>
+            <a:ext cx="3443122" cy="420624"/>
           </a:xfrm>
           <a:prstGeom prst="rect">
             <a:avLst/>
@@ -7548,8 +7615,8 @@
         </p:nvSpPr>
         <p:spPr>
           <a:xfrm>
-            <a:off x="4216451" y="3194304"/>
-            <a:ext cx="3756050" cy="420624"/>
+            <a:off x="4443557" y="3194304"/>
+            <a:ext cx="3443122" cy="420624"/>
           </a:xfrm>
           <a:prstGeom prst="rect">
             <a:avLst/>
@@ -7598,8 +7665,8 @@
         </p:nvSpPr>
         <p:spPr>
           <a:xfrm>
-            <a:off x="4216451" y="3965448"/>
-            <a:ext cx="3756050" cy="420624"/>
+            <a:off x="4443557" y="3965448"/>
+            <a:ext cx="3443122" cy="420624"/>
           </a:xfrm>
           <a:prstGeom prst="rect">
             <a:avLst/>
@@ -7623,7 +7690,7 @@
                 <a:ea typeface="メイリオ" pitchFamily="34" charset="-122"/>
                 <a:cs typeface="メイリオ" pitchFamily="34" charset="-120"/>
               </a:rPr>
-              <a:t>血漿コリンエステラーゼで</a:t>
+              <a:t>血漿コリンエステラーゼ</a:t>
             </a:r>
             <a:endParaRPr lang="ja-JP" sz="2200" dirty="0"/>
           </a:p>
@@ -7637,8 +7704,8 @@
         </p:nvSpPr>
         <p:spPr>
           <a:xfrm>
-            <a:off x="4490771" y="4386072"/>
-            <a:ext cx="3481730" cy="420624"/>
+            <a:off x="4717877" y="4386072"/>
+            <a:ext cx="3168802" cy="420624"/>
           </a:xfrm>
           <a:prstGeom prst="rect">
             <a:avLst/>
@@ -7662,7 +7729,7 @@
                 <a:ea typeface="メイリオ" pitchFamily="34" charset="-122"/>
                 <a:cs typeface="メイリオ" pitchFamily="34" charset="-120"/>
               </a:rPr>
-              <a:t>分解</a:t>
+              <a:t>で分解</a:t>
             </a:r>
             <a:endParaRPr lang="ja-JP" sz="2200" dirty="0"/>
           </a:p>
@@ -7676,12 +7743,12 @@
         </p:nvSpPr>
         <p:spPr>
           <a:xfrm>
-            <a:off x="8301685" y="1691640"/>
-            <a:ext cx="3384347" cy="4032504"/>
+            <a:off x="8307304" y="1691640"/>
+            <a:ext cx="3378728" cy="4032504"/>
           </a:xfrm>
           <a:prstGeom prst="roundRect">
             <a:avLst>
-              <a:gd name="adj" fmla="val 2161"/>
+              <a:gd name="adj" fmla="val 2165"/>
             </a:avLst>
           </a:prstGeom>
           <a:solidFill>
@@ -7698,8 +7765,8 @@
         </p:nvSpPr>
         <p:spPr>
           <a:xfrm>
-            <a:off x="8411413" y="1837944"/>
-            <a:ext cx="3164891" cy="457200"/>
+            <a:off x="8508472" y="1837944"/>
+            <a:ext cx="2976392" cy="457200"/>
           </a:xfrm>
           <a:prstGeom prst="rect">
             <a:avLst/>
@@ -7717,7 +7784,7 @@
             <a:r>
               <a:rPr lang="ja-JP" altLang="en-US" sz="2400" b="1" dirty="0">
                 <a:solidFill>
-                  <a:srgbClr val="D55E00"/>
+                  <a:srgbClr val="C00000"/>
                 </a:solidFill>
                 <a:latin typeface="メイリオ" pitchFamily="34" charset="0"/>
                 <a:ea typeface="メイリオ" pitchFamily="34" charset="-122"/>
@@ -7737,8 +7804,8 @@
         </p:nvSpPr>
         <p:spPr>
           <a:xfrm>
-            <a:off x="8411413" y="2423160"/>
-            <a:ext cx="3164891" cy="420624"/>
+            <a:off x="8508472" y="2423160"/>
+            <a:ext cx="2976392" cy="420624"/>
           </a:xfrm>
           <a:prstGeom prst="rect">
             <a:avLst/>
@@ -7776,8 +7843,8 @@
         </p:nvSpPr>
         <p:spPr>
           <a:xfrm>
-            <a:off x="8411413" y="3194304"/>
-            <a:ext cx="3164891" cy="420624"/>
+            <a:off x="8508472" y="3194304"/>
+            <a:ext cx="2976392" cy="420624"/>
           </a:xfrm>
           <a:prstGeom prst="rect">
             <a:avLst/>
@@ -7826,8 +7893,8 @@
         </p:nvSpPr>
         <p:spPr>
           <a:xfrm>
-            <a:off x="8411413" y="3965448"/>
-            <a:ext cx="3164891" cy="420624"/>
+            <a:off x="8508472" y="3965448"/>
+            <a:ext cx="2976392" cy="420624"/>
           </a:xfrm>
           <a:prstGeom prst="rect">
             <a:avLst/>
@@ -7865,8 +7932,8 @@
         </p:nvSpPr>
         <p:spPr>
           <a:xfrm>
-            <a:off x="8685733" y="4386072"/>
-            <a:ext cx="2890571" cy="420624"/>
+            <a:off x="8782792" y="4386072"/>
+            <a:ext cx="2702072" cy="420624"/>
           </a:xfrm>
           <a:prstGeom prst="rect">
             <a:avLst/>
@@ -7904,8 +7971,8 @@
         </p:nvSpPr>
         <p:spPr>
           <a:xfrm>
-            <a:off x="8411413" y="5157216"/>
-            <a:ext cx="3164891" cy="420624"/>
+            <a:off x="8508472" y="5157216"/>
+            <a:ext cx="2976392" cy="420624"/>
           </a:xfrm>
           <a:prstGeom prst="rect">
             <a:avLst/>
@@ -8044,7 +8111,7 @@
           </a:xfrm>
           <a:prstGeom prst="roundRect">
             <a:avLst>
-              <a:gd name="adj" fmla="val 15625"/>
+              <a:gd name="adj" fmla="val 7813"/>
             </a:avLst>
           </a:prstGeom>
           <a:solidFill>
@@ -8053,14 +8120,14 @@
           <a:ln/>
         </p:spPr>
         <p:txBody>
-          <a:bodyPr wrap="square" lIns="0" tIns="0" rIns="0" bIns="0" rtlCol="0" anchor="ctr"/>
+          <a:bodyPr wrap="none" lIns="0" tIns="0" rIns="0" bIns="0" rtlCol="0" anchor="ctr"/>
           <a:lstStyle/>
           <a:p>
             <a:pPr algn="ctr" indent="0" marL="0">
               <a:buNone/>
             </a:pPr>
             <a:r>
-              <a:rPr lang="ja-JP" altLang="en-US" sz="1100" dirty="0">
+              <a:rPr lang="ja-JP" altLang="en-US" sz="1050" dirty="0">
                 <a:solidFill>
                   <a:srgbClr val="404040"/>
                 </a:solidFill>
@@ -8070,7 +8137,7 @@
               </a:rPr>
               <a:t>仕組み</a:t>
             </a:r>
-            <a:endParaRPr lang="ja-JP" sz="1100" dirty="0"/>
+            <a:endParaRPr lang="ja-JP" sz="1050" dirty="0"/>
           </a:p>
         </p:txBody>
       </p:sp>
@@ -8087,7 +8154,7 @@
           </a:xfrm>
           <a:prstGeom prst="roundRect">
             <a:avLst>
-              <a:gd name="adj" fmla="val 15625"/>
+              <a:gd name="adj" fmla="val 7813"/>
             </a:avLst>
           </a:prstGeom>
           <a:solidFill>
@@ -8096,14 +8163,14 @@
           <a:ln/>
         </p:spPr>
         <p:txBody>
-          <a:bodyPr wrap="square" lIns="0" tIns="0" rIns="0" bIns="0" rtlCol="0" anchor="ctr"/>
+          <a:bodyPr wrap="none" lIns="0" tIns="0" rIns="0" bIns="0" rtlCol="0" anchor="ctr"/>
           <a:lstStyle/>
           <a:p>
             <a:pPr algn="ctr" indent="0" marL="0">
               <a:buNone/>
             </a:pPr>
             <a:r>
-              <a:rPr lang="ja-JP" altLang="en-US" sz="1100" dirty="0">
+              <a:rPr lang="ja-JP" altLang="en-US" sz="1050" dirty="0">
                 <a:solidFill>
                   <a:srgbClr val="404040"/>
                 </a:solidFill>
@@ -8113,14 +8180,14 @@
               </a:rPr>
               <a:t>ロクロ</a:t>
             </a:r>
-            <a:endParaRPr lang="ja-JP" sz="1100" dirty="0"/>
+            <a:endParaRPr lang="ja-JP" sz="1050" dirty="0"/>
           </a:p>
           <a:p>
             <a:pPr algn="ctr" indent="0" marL="0">
               <a:buNone/>
             </a:pPr>
             <a:r>
-              <a:rPr lang="ja-JP" altLang="en-US" sz="1100" dirty="0">
+              <a:rPr lang="ja-JP" altLang="en-US" sz="1050" dirty="0">
                 <a:solidFill>
                   <a:srgbClr val="404040"/>
                 </a:solidFill>
@@ -8130,7 +8197,7 @@
               </a:rPr>
               <a:t>ニウム</a:t>
             </a:r>
-            <a:endParaRPr lang="ja-JP" sz="1100" dirty="0"/>
+            <a:endParaRPr lang="ja-JP" sz="1050" dirty="0"/>
           </a:p>
         </p:txBody>
       </p:sp>
@@ -8147,7 +8214,7 @@
           </a:xfrm>
           <a:prstGeom prst="roundRect">
             <a:avLst>
-              <a:gd name="adj" fmla="val 15625"/>
+              <a:gd name="adj" fmla="val 7813"/>
             </a:avLst>
           </a:prstGeom>
           <a:solidFill>
@@ -8156,14 +8223,14 @@
           <a:ln/>
         </p:spPr>
         <p:txBody>
-          <a:bodyPr wrap="square" lIns="0" tIns="0" rIns="0" bIns="0" rtlCol="0" anchor="ctr"/>
+          <a:bodyPr wrap="none" lIns="0" tIns="0" rIns="0" bIns="0" rtlCol="0" anchor="ctr"/>
           <a:lstStyle/>
           <a:p>
             <a:pPr algn="ctr" indent="0" marL="0">
               <a:buNone/>
             </a:pPr>
             <a:r>
-              <a:rPr lang="ja-JP" altLang="en-US" sz="1100" dirty="0">
+              <a:rPr lang="ja-JP" altLang="en-US" sz="1050" dirty="0">
                 <a:solidFill>
                   <a:srgbClr val="404040"/>
                 </a:solidFill>
@@ -8173,14 +8240,14 @@
               </a:rPr>
               <a:t>スキサメ</a:t>
             </a:r>
-            <a:endParaRPr lang="ja-JP" sz="1100" dirty="0"/>
+            <a:endParaRPr lang="ja-JP" sz="1050" dirty="0"/>
           </a:p>
           <a:p>
             <a:pPr algn="ctr" indent="0" marL="0">
               <a:buNone/>
             </a:pPr>
             <a:r>
-              <a:rPr lang="ja-JP" altLang="en-US" sz="1100" dirty="0">
+              <a:rPr lang="ja-JP" altLang="en-US" sz="1050" dirty="0">
                 <a:solidFill>
                   <a:srgbClr val="404040"/>
                 </a:solidFill>
@@ -8190,7 +8257,7 @@
               </a:rPr>
               <a:t>トニウム</a:t>
             </a:r>
-            <a:endParaRPr lang="ja-JP" sz="1100" dirty="0"/>
+            <a:endParaRPr lang="ja-JP" sz="1050" dirty="0"/>
           </a:p>
         </p:txBody>
       </p:sp>
@@ -8207,7 +8274,7 @@
           </a:xfrm>
           <a:prstGeom prst="roundRect">
             <a:avLst>
-              <a:gd name="adj" fmla="val 15625"/>
+              <a:gd name="adj" fmla="val 7813"/>
             </a:avLst>
           </a:prstGeom>
           <a:solidFill>
@@ -8216,14 +8283,14 @@
           <a:ln/>
         </p:spPr>
         <p:txBody>
-          <a:bodyPr wrap="square" lIns="0" tIns="0" rIns="0" bIns="0" rtlCol="0" anchor="ctr"/>
+          <a:bodyPr wrap="none" lIns="0" tIns="0" rIns="0" bIns="0" rtlCol="0" anchor="ctr"/>
           <a:lstStyle/>
           <a:p>
             <a:pPr algn="ctr" indent="0" marL="0">
               <a:buNone/>
             </a:pPr>
             <a:r>
-              <a:rPr lang="ja-JP" altLang="en-US" sz="1100" b="1" dirty="0">
+              <a:rPr lang="ja-JP" altLang="en-US" sz="1050" b="1" dirty="0">
                 <a:solidFill>
                   <a:srgbClr val="FFFFFF"/>
                 </a:solidFill>
@@ -8233,14 +8300,14 @@
               </a:rPr>
               <a:t>重い</a:t>
             </a:r>
-            <a:endParaRPr lang="ja-JP" sz="1100" dirty="0"/>
+            <a:endParaRPr lang="ja-JP" sz="1050" dirty="0"/>
           </a:p>
           <a:p>
             <a:pPr algn="ctr" indent="0" marL="0">
               <a:buNone/>
             </a:pPr>
             <a:r>
-              <a:rPr lang="ja-JP" altLang="en-US" sz="1100" b="1" dirty="0">
+              <a:rPr lang="ja-JP" altLang="en-US" sz="1050" b="1" dirty="0">
                 <a:solidFill>
                   <a:srgbClr val="FFFFFF"/>
                 </a:solidFill>
@@ -8250,7 +8317,7 @@
               </a:rPr>
               <a:t>副作用</a:t>
             </a:r>
-            <a:endParaRPr lang="ja-JP" sz="1100" dirty="0"/>
+            <a:endParaRPr lang="ja-JP" sz="1050" dirty="0"/>
           </a:p>
         </p:txBody>
       </p:sp>
@@ -8267,7 +8334,7 @@
           </a:xfrm>
           <a:prstGeom prst="roundRect">
             <a:avLst>
-              <a:gd name="adj" fmla="val 15625"/>
+              <a:gd name="adj" fmla="val 7813"/>
             </a:avLst>
           </a:prstGeom>
           <a:solidFill>
@@ -8276,14 +8343,14 @@
           <a:ln/>
         </p:spPr>
         <p:txBody>
-          <a:bodyPr wrap="square" lIns="0" tIns="0" rIns="0" bIns="0" rtlCol="0" anchor="ctr"/>
+          <a:bodyPr wrap="none" lIns="0" tIns="0" rIns="0" bIns="0" rtlCol="0" anchor="ctr"/>
           <a:lstStyle/>
           <a:p>
             <a:pPr algn="ctr" indent="0" marL="0">
               <a:buNone/>
             </a:pPr>
             <a:r>
-              <a:rPr lang="ja-JP" altLang="en-US" sz="1100" dirty="0">
+              <a:rPr lang="ja-JP" altLang="en-US" sz="1050" dirty="0">
                 <a:solidFill>
                   <a:srgbClr val="404040"/>
                 </a:solidFill>
@@ -8293,7 +8360,7 @@
               </a:rPr>
               <a:t>使い方</a:t>
             </a:r>
-            <a:endParaRPr lang="ja-JP" sz="1100" dirty="0"/>
+            <a:endParaRPr lang="ja-JP" sz="1050" dirty="0"/>
           </a:p>
         </p:txBody>
       </p:sp>
@@ -8401,7 +8468,7 @@
         <p:spPr>
           <a:xfrm>
             <a:off x="502920" y="1691640"/>
-            <a:ext cx="5436108" cy="4032504"/>
+            <a:ext cx="5340096" cy="4032504"/>
           </a:xfrm>
           <a:prstGeom prst="roundRect">
             <a:avLst>
@@ -8422,8 +8489,8 @@
         </p:nvSpPr>
         <p:spPr>
           <a:xfrm>
-            <a:off x="640080" y="1837944"/>
-            <a:ext cx="5161788" cy="996696"/>
+            <a:off x="704088" y="1837944"/>
+            <a:ext cx="4937760" cy="996696"/>
           </a:xfrm>
           <a:prstGeom prst="rect">
             <a:avLst/>
@@ -8441,7 +8508,7 @@
             <a:r>
               <a:rPr lang="ja-JP" altLang="en-US" sz="2800" b="1" dirty="0">
                 <a:solidFill>
-                  <a:srgbClr val="D55E00"/>
+                  <a:srgbClr val="C00000"/>
                 </a:solidFill>
                 <a:latin typeface="メイリオ" pitchFamily="34" charset="0"/>
                 <a:ea typeface="メイリオ" pitchFamily="34" charset="-122"/>
@@ -8458,7 +8525,7 @@
             <a:r>
               <a:rPr lang="ja-JP" altLang="en-US" sz="2400" b="1" dirty="0">
                 <a:solidFill>
-                  <a:srgbClr val="D55E00"/>
+                  <a:srgbClr val="C00000"/>
                 </a:solidFill>
                 <a:latin typeface="メイリオ" pitchFamily="34" charset="0"/>
                 <a:ea typeface="メイリオ" pitchFamily="34" charset="-122"/>
@@ -8478,8 +8545,8 @@
         </p:nvSpPr>
         <p:spPr>
           <a:xfrm>
-            <a:off x="640080" y="2962656"/>
-            <a:ext cx="5161788" cy="457200"/>
+            <a:off x="704088" y="2962656"/>
+            <a:ext cx="4937760" cy="457200"/>
           </a:xfrm>
           <a:prstGeom prst="rect">
             <a:avLst/>
@@ -8517,8 +8584,8 @@
         </p:nvSpPr>
         <p:spPr>
           <a:xfrm>
-            <a:off x="640080" y="3584448"/>
-            <a:ext cx="5161788" cy="457200"/>
+            <a:off x="704088" y="3584448"/>
+            <a:ext cx="4937760" cy="457200"/>
           </a:xfrm>
           <a:prstGeom prst="rect">
             <a:avLst/>
@@ -8578,8 +8645,8 @@
         </p:nvSpPr>
         <p:spPr>
           <a:xfrm>
-            <a:off x="640080" y="4206240"/>
-            <a:ext cx="5161788" cy="457200"/>
+            <a:off x="704088" y="4206240"/>
+            <a:ext cx="4937760" cy="457200"/>
           </a:xfrm>
           <a:prstGeom prst="rect">
             <a:avLst/>
@@ -8617,8 +8684,8 @@
         </p:nvSpPr>
         <p:spPr>
           <a:xfrm>
-            <a:off x="969264" y="4663440"/>
-            <a:ext cx="4832604" cy="457200"/>
+            <a:off x="1033272" y="4663440"/>
+            <a:ext cx="4608576" cy="457200"/>
           </a:xfrm>
           <a:prstGeom prst="rect">
             <a:avLst/>
@@ -8656,8 +8723,8 @@
         </p:nvSpPr>
         <p:spPr>
           <a:xfrm>
-            <a:off x="969264" y="5120640"/>
-            <a:ext cx="4832604" cy="457200"/>
+            <a:off x="1033272" y="5120640"/>
+            <a:ext cx="4608576" cy="457200"/>
           </a:xfrm>
           <a:prstGeom prst="rect">
             <a:avLst/>
@@ -8706,8 +8773,8 @@
         </p:nvSpPr>
         <p:spPr>
           <a:xfrm>
-            <a:off x="6249924" y="1691640"/>
-            <a:ext cx="5436108" cy="4032504"/>
+            <a:off x="6153912" y="1691640"/>
+            <a:ext cx="5532120" cy="4032504"/>
           </a:xfrm>
           <a:prstGeom prst="roundRect">
             <a:avLst>
@@ -8728,8 +8795,8 @@
         </p:nvSpPr>
         <p:spPr>
           <a:xfrm>
-            <a:off x="6387084" y="1837944"/>
-            <a:ext cx="5161788" cy="539496"/>
+            <a:off x="6355080" y="1837944"/>
+            <a:ext cx="5129784" cy="539496"/>
           </a:xfrm>
           <a:prstGeom prst="rect">
             <a:avLst/>
@@ -8747,7 +8814,7 @@
             <a:r>
               <a:rPr lang="ja-JP" altLang="en-US" sz="2800" b="1" dirty="0">
                 <a:solidFill>
-                  <a:srgbClr val="D55E00"/>
+                  <a:srgbClr val="C00000"/>
                 </a:solidFill>
                 <a:latin typeface="メイリオ" pitchFamily="34" charset="0"/>
                 <a:ea typeface="メイリオ" pitchFamily="34" charset="-122"/>
@@ -8767,8 +8834,8 @@
         </p:nvSpPr>
         <p:spPr>
           <a:xfrm>
-            <a:off x="6387084" y="2505456"/>
-            <a:ext cx="5161788" cy="457200"/>
+            <a:off x="6355080" y="2962656"/>
+            <a:ext cx="5129784" cy="457200"/>
           </a:xfrm>
           <a:prstGeom prst="rect">
             <a:avLst/>
@@ -8806,8 +8873,8 @@
         </p:nvSpPr>
         <p:spPr>
           <a:xfrm>
-            <a:off x="6716268" y="2962656"/>
-            <a:ext cx="4832604" cy="457200"/>
+            <a:off x="6684264" y="3419856"/>
+            <a:ext cx="4800600" cy="457200"/>
           </a:xfrm>
           <a:prstGeom prst="rect">
             <a:avLst/>
@@ -8845,8 +8912,8 @@
         </p:nvSpPr>
         <p:spPr>
           <a:xfrm>
-            <a:off x="6387084" y="3584448"/>
-            <a:ext cx="5161788" cy="457200"/>
+            <a:off x="6355080" y="4041648"/>
+            <a:ext cx="5129784" cy="457200"/>
           </a:xfrm>
           <a:prstGeom prst="rect">
             <a:avLst/>
@@ -8895,8 +8962,8 @@
         </p:nvSpPr>
         <p:spPr>
           <a:xfrm>
-            <a:off x="6716268" y="4041648"/>
-            <a:ext cx="4832604" cy="457200"/>
+            <a:off x="6684264" y="4498848"/>
+            <a:ext cx="4800600" cy="457200"/>
           </a:xfrm>
           <a:prstGeom prst="rect">
             <a:avLst/>
@@ -8934,8 +9001,8 @@
         </p:nvSpPr>
         <p:spPr>
           <a:xfrm>
-            <a:off x="6387084" y="4663440"/>
-            <a:ext cx="5161788" cy="457200"/>
+            <a:off x="6355080" y="5120640"/>
+            <a:ext cx="5129784" cy="457200"/>
           </a:xfrm>
           <a:prstGeom prst="rect">
             <a:avLst/>
@@ -9085,7 +9152,7 @@
           </a:xfrm>
           <a:prstGeom prst="roundRect">
             <a:avLst>
-              <a:gd name="adj" fmla="val 15625"/>
+              <a:gd name="adj" fmla="val 7813"/>
             </a:avLst>
           </a:prstGeom>
           <a:solidFill>
@@ -9094,14 +9161,14 @@
           <a:ln/>
         </p:spPr>
         <p:txBody>
-          <a:bodyPr wrap="square" lIns="0" tIns="0" rIns="0" bIns="0" rtlCol="0" anchor="ctr"/>
+          <a:bodyPr wrap="none" lIns="0" tIns="0" rIns="0" bIns="0" rtlCol="0" anchor="ctr"/>
           <a:lstStyle/>
           <a:p>
             <a:pPr algn="ctr" indent="0" marL="0">
               <a:buNone/>
             </a:pPr>
             <a:r>
-              <a:rPr lang="ja-JP" altLang="en-US" sz="1100" dirty="0">
+              <a:rPr lang="ja-JP" altLang="en-US" sz="1050" dirty="0">
                 <a:solidFill>
                   <a:srgbClr val="404040"/>
                 </a:solidFill>
@@ -9111,7 +9178,7 @@
               </a:rPr>
               <a:t>仕組み</a:t>
             </a:r>
-            <a:endParaRPr lang="ja-JP" sz="1100" dirty="0"/>
+            <a:endParaRPr lang="ja-JP" sz="1050" dirty="0"/>
           </a:p>
         </p:txBody>
       </p:sp>
@@ -9128,7 +9195,7 @@
           </a:xfrm>
           <a:prstGeom prst="roundRect">
             <a:avLst>
-              <a:gd name="adj" fmla="val 15625"/>
+              <a:gd name="adj" fmla="val 7813"/>
             </a:avLst>
           </a:prstGeom>
           <a:solidFill>
@@ -9137,14 +9204,14 @@
           <a:ln/>
         </p:spPr>
         <p:txBody>
-          <a:bodyPr wrap="square" lIns="0" tIns="0" rIns="0" bIns="0" rtlCol="0" anchor="ctr"/>
+          <a:bodyPr wrap="none" lIns="0" tIns="0" rIns="0" bIns="0" rtlCol="0" anchor="ctr"/>
           <a:lstStyle/>
           <a:p>
             <a:pPr algn="ctr" indent="0" marL="0">
               <a:buNone/>
             </a:pPr>
             <a:r>
-              <a:rPr lang="ja-JP" altLang="en-US" sz="1100" dirty="0">
+              <a:rPr lang="ja-JP" altLang="en-US" sz="1050" dirty="0">
                 <a:solidFill>
                   <a:srgbClr val="404040"/>
                 </a:solidFill>
@@ -9154,14 +9221,14 @@
               </a:rPr>
               <a:t>ロクロ</a:t>
             </a:r>
-            <a:endParaRPr lang="ja-JP" sz="1100" dirty="0"/>
+            <a:endParaRPr lang="ja-JP" sz="1050" dirty="0"/>
           </a:p>
           <a:p>
             <a:pPr algn="ctr" indent="0" marL="0">
               <a:buNone/>
             </a:pPr>
             <a:r>
-              <a:rPr lang="ja-JP" altLang="en-US" sz="1100" dirty="0">
+              <a:rPr lang="ja-JP" altLang="en-US" sz="1050" dirty="0">
                 <a:solidFill>
                   <a:srgbClr val="404040"/>
                 </a:solidFill>
@@ -9171,7 +9238,7 @@
               </a:rPr>
               <a:t>ニウム</a:t>
             </a:r>
-            <a:endParaRPr lang="ja-JP" sz="1100" dirty="0"/>
+            <a:endParaRPr lang="ja-JP" sz="1050" dirty="0"/>
           </a:p>
         </p:txBody>
       </p:sp>
@@ -9188,7 +9255,7 @@
           </a:xfrm>
           <a:prstGeom prst="roundRect">
             <a:avLst>
-              <a:gd name="adj" fmla="val 15625"/>
+              <a:gd name="adj" fmla="val 7813"/>
             </a:avLst>
           </a:prstGeom>
           <a:solidFill>
@@ -9197,14 +9264,14 @@
           <a:ln/>
         </p:spPr>
         <p:txBody>
-          <a:bodyPr wrap="square" lIns="0" tIns="0" rIns="0" bIns="0" rtlCol="0" anchor="ctr"/>
+          <a:bodyPr wrap="none" lIns="0" tIns="0" rIns="0" bIns="0" rtlCol="0" anchor="ctr"/>
           <a:lstStyle/>
           <a:p>
             <a:pPr algn="ctr" indent="0" marL="0">
               <a:buNone/>
             </a:pPr>
             <a:r>
-              <a:rPr lang="ja-JP" altLang="en-US" sz="1100" dirty="0">
+              <a:rPr lang="ja-JP" altLang="en-US" sz="1050" dirty="0">
                 <a:solidFill>
                   <a:srgbClr val="404040"/>
                 </a:solidFill>
@@ -9214,14 +9281,14 @@
               </a:rPr>
               <a:t>スキサメ</a:t>
             </a:r>
-            <a:endParaRPr lang="ja-JP" sz="1100" dirty="0"/>
+            <a:endParaRPr lang="ja-JP" sz="1050" dirty="0"/>
           </a:p>
           <a:p>
             <a:pPr algn="ctr" indent="0" marL="0">
               <a:buNone/>
             </a:pPr>
             <a:r>
-              <a:rPr lang="ja-JP" altLang="en-US" sz="1100" dirty="0">
+              <a:rPr lang="ja-JP" altLang="en-US" sz="1050" dirty="0">
                 <a:solidFill>
                   <a:srgbClr val="404040"/>
                 </a:solidFill>
@@ -9231,7 +9298,7 @@
               </a:rPr>
               <a:t>トニウム</a:t>
             </a:r>
-            <a:endParaRPr lang="ja-JP" sz="1100" dirty="0"/>
+            <a:endParaRPr lang="ja-JP" sz="1050" dirty="0"/>
           </a:p>
         </p:txBody>
       </p:sp>
@@ -9248,7 +9315,7 @@
           </a:xfrm>
           <a:prstGeom prst="roundRect">
             <a:avLst>
-              <a:gd name="adj" fmla="val 15625"/>
+              <a:gd name="adj" fmla="val 7813"/>
             </a:avLst>
           </a:prstGeom>
           <a:solidFill>
@@ -9257,14 +9324,14 @@
           <a:ln/>
         </p:spPr>
         <p:txBody>
-          <a:bodyPr wrap="square" lIns="0" tIns="0" rIns="0" bIns="0" rtlCol="0" anchor="ctr"/>
+          <a:bodyPr wrap="none" lIns="0" tIns="0" rIns="0" bIns="0" rtlCol="0" anchor="ctr"/>
           <a:lstStyle/>
           <a:p>
             <a:pPr algn="ctr" indent="0" marL="0">
               <a:buNone/>
             </a:pPr>
             <a:r>
-              <a:rPr lang="ja-JP" altLang="en-US" sz="1100" b="1" dirty="0">
+              <a:rPr lang="ja-JP" altLang="en-US" sz="1050" b="1" dirty="0">
                 <a:solidFill>
                   <a:srgbClr val="FFFFFF"/>
                 </a:solidFill>
@@ -9274,14 +9341,14 @@
               </a:rPr>
               <a:t>重い</a:t>
             </a:r>
-            <a:endParaRPr lang="ja-JP" sz="1100" dirty="0"/>
+            <a:endParaRPr lang="ja-JP" sz="1050" dirty="0"/>
           </a:p>
           <a:p>
             <a:pPr algn="ctr" indent="0" marL="0">
               <a:buNone/>
             </a:pPr>
             <a:r>
-              <a:rPr lang="ja-JP" altLang="en-US" sz="1100" b="1" dirty="0">
+              <a:rPr lang="ja-JP" altLang="en-US" sz="1050" b="1" dirty="0">
                 <a:solidFill>
                   <a:srgbClr val="FFFFFF"/>
                 </a:solidFill>
@@ -9291,7 +9358,7 @@
               </a:rPr>
               <a:t>副作用</a:t>
             </a:r>
-            <a:endParaRPr lang="ja-JP" sz="1100" dirty="0"/>
+            <a:endParaRPr lang="ja-JP" sz="1050" dirty="0"/>
           </a:p>
         </p:txBody>
       </p:sp>
@@ -9308,7 +9375,7 @@
           </a:xfrm>
           <a:prstGeom prst="roundRect">
             <a:avLst>
-              <a:gd name="adj" fmla="val 15625"/>
+              <a:gd name="adj" fmla="val 7813"/>
             </a:avLst>
           </a:prstGeom>
           <a:solidFill>
@@ -9317,14 +9384,14 @@
           <a:ln/>
         </p:spPr>
         <p:txBody>
-          <a:bodyPr wrap="square" lIns="0" tIns="0" rIns="0" bIns="0" rtlCol="0" anchor="ctr"/>
+          <a:bodyPr wrap="none" lIns="0" tIns="0" rIns="0" bIns="0" rtlCol="0" anchor="ctr"/>
           <a:lstStyle/>
           <a:p>
             <a:pPr algn="ctr" indent="0" marL="0">
               <a:buNone/>
             </a:pPr>
             <a:r>
-              <a:rPr lang="ja-JP" altLang="en-US" sz="1100" dirty="0">
+              <a:rPr lang="ja-JP" altLang="en-US" sz="1050" dirty="0">
                 <a:solidFill>
                   <a:srgbClr val="404040"/>
                 </a:solidFill>
@@ -9334,7 +9401,7 @@
               </a:rPr>
               <a:t>使い方</a:t>
             </a:r>
-            <a:endParaRPr lang="ja-JP" sz="1100" dirty="0"/>
+            <a:endParaRPr lang="ja-JP" sz="1050" dirty="0"/>
           </a:p>
         </p:txBody>
       </p:sp>
@@ -9750,7 +9817,7 @@
           </a:xfrm>
           <a:prstGeom prst="roundRect">
             <a:avLst>
-              <a:gd name="adj" fmla="val 15625"/>
+              <a:gd name="adj" fmla="val 7813"/>
             </a:avLst>
           </a:prstGeom>
           <a:solidFill>
@@ -9759,14 +9826,14 @@
           <a:ln/>
         </p:spPr>
         <p:txBody>
-          <a:bodyPr wrap="square" lIns="0" tIns="0" rIns="0" bIns="0" rtlCol="0" anchor="ctr"/>
+          <a:bodyPr wrap="none" lIns="0" tIns="0" rIns="0" bIns="0" rtlCol="0" anchor="ctr"/>
           <a:lstStyle/>
           <a:p>
             <a:pPr algn="ctr" indent="0" marL="0">
               <a:buNone/>
             </a:pPr>
             <a:r>
-              <a:rPr lang="ja-JP" altLang="en-US" sz="1100" dirty="0">
+              <a:rPr lang="ja-JP" altLang="en-US" sz="1050" dirty="0">
                 <a:solidFill>
                   <a:srgbClr val="404040"/>
                 </a:solidFill>
@@ -9776,7 +9843,7 @@
               </a:rPr>
               <a:t>仕組み</a:t>
             </a:r>
-            <a:endParaRPr lang="ja-JP" sz="1100" dirty="0"/>
+            <a:endParaRPr lang="ja-JP" sz="1050" dirty="0"/>
           </a:p>
         </p:txBody>
       </p:sp>
@@ -9793,7 +9860,7 @@
           </a:xfrm>
           <a:prstGeom prst="roundRect">
             <a:avLst>
-              <a:gd name="adj" fmla="val 15625"/>
+              <a:gd name="adj" fmla="val 7813"/>
             </a:avLst>
           </a:prstGeom>
           <a:solidFill>
@@ -9802,14 +9869,14 @@
           <a:ln/>
         </p:spPr>
         <p:txBody>
-          <a:bodyPr wrap="square" lIns="0" tIns="0" rIns="0" bIns="0" rtlCol="0" anchor="ctr"/>
+          <a:bodyPr wrap="none" lIns="0" tIns="0" rIns="0" bIns="0" rtlCol="0" anchor="ctr"/>
           <a:lstStyle/>
           <a:p>
             <a:pPr algn="ctr" indent="0" marL="0">
               <a:buNone/>
             </a:pPr>
             <a:r>
-              <a:rPr lang="ja-JP" altLang="en-US" sz="1100" dirty="0">
+              <a:rPr lang="ja-JP" altLang="en-US" sz="1050" dirty="0">
                 <a:solidFill>
                   <a:srgbClr val="404040"/>
                 </a:solidFill>
@@ -9819,14 +9886,14 @@
               </a:rPr>
               <a:t>ロクロ</a:t>
             </a:r>
-            <a:endParaRPr lang="ja-JP" sz="1100" dirty="0"/>
+            <a:endParaRPr lang="ja-JP" sz="1050" dirty="0"/>
           </a:p>
           <a:p>
             <a:pPr algn="ctr" indent="0" marL="0">
               <a:buNone/>
             </a:pPr>
             <a:r>
-              <a:rPr lang="ja-JP" altLang="en-US" sz="1100" dirty="0">
+              <a:rPr lang="ja-JP" altLang="en-US" sz="1050" dirty="0">
                 <a:solidFill>
                   <a:srgbClr val="404040"/>
                 </a:solidFill>
@@ -9836,7 +9903,7 @@
               </a:rPr>
               <a:t>ニウム</a:t>
             </a:r>
-            <a:endParaRPr lang="ja-JP" sz="1100" dirty="0"/>
+            <a:endParaRPr lang="ja-JP" sz="1050" dirty="0"/>
           </a:p>
         </p:txBody>
       </p:sp>
@@ -9853,7 +9920,7 @@
           </a:xfrm>
           <a:prstGeom prst="roundRect">
             <a:avLst>
-              <a:gd name="adj" fmla="val 15625"/>
+              <a:gd name="adj" fmla="val 7813"/>
             </a:avLst>
           </a:prstGeom>
           <a:solidFill>
@@ -9862,14 +9929,14 @@
           <a:ln/>
         </p:spPr>
         <p:txBody>
-          <a:bodyPr wrap="square" lIns="0" tIns="0" rIns="0" bIns="0" rtlCol="0" anchor="ctr"/>
+          <a:bodyPr wrap="none" lIns="0" tIns="0" rIns="0" bIns="0" rtlCol="0" anchor="ctr"/>
           <a:lstStyle/>
           <a:p>
             <a:pPr algn="ctr" indent="0" marL="0">
               <a:buNone/>
             </a:pPr>
             <a:r>
-              <a:rPr lang="ja-JP" altLang="en-US" sz="1100" dirty="0">
+              <a:rPr lang="ja-JP" altLang="en-US" sz="1050" dirty="0">
                 <a:solidFill>
                   <a:srgbClr val="404040"/>
                 </a:solidFill>
@@ -9879,14 +9946,14 @@
               </a:rPr>
               <a:t>スキサメ</a:t>
             </a:r>
-            <a:endParaRPr lang="ja-JP" sz="1100" dirty="0"/>
+            <a:endParaRPr lang="ja-JP" sz="1050" dirty="0"/>
           </a:p>
           <a:p>
             <a:pPr algn="ctr" indent="0" marL="0">
               <a:buNone/>
             </a:pPr>
             <a:r>
-              <a:rPr lang="ja-JP" altLang="en-US" sz="1100" dirty="0">
+              <a:rPr lang="ja-JP" altLang="en-US" sz="1050" dirty="0">
                 <a:solidFill>
                   <a:srgbClr val="404040"/>
                 </a:solidFill>
@@ -9896,7 +9963,7 @@
               </a:rPr>
               <a:t>トニウム</a:t>
             </a:r>
-            <a:endParaRPr lang="ja-JP" sz="1100" dirty="0"/>
+            <a:endParaRPr lang="ja-JP" sz="1050" dirty="0"/>
           </a:p>
         </p:txBody>
       </p:sp>
@@ -9913,7 +9980,7 @@
           </a:xfrm>
           <a:prstGeom prst="roundRect">
             <a:avLst>
-              <a:gd name="adj" fmla="val 15625"/>
+              <a:gd name="adj" fmla="val 7813"/>
             </a:avLst>
           </a:prstGeom>
           <a:solidFill>
@@ -9922,14 +9989,14 @@
           <a:ln/>
         </p:spPr>
         <p:txBody>
-          <a:bodyPr wrap="square" lIns="0" tIns="0" rIns="0" bIns="0" rtlCol="0" anchor="ctr"/>
+          <a:bodyPr wrap="none" lIns="0" tIns="0" rIns="0" bIns="0" rtlCol="0" anchor="ctr"/>
           <a:lstStyle/>
           <a:p>
             <a:pPr algn="ctr" indent="0" marL="0">
               <a:buNone/>
             </a:pPr>
             <a:r>
-              <a:rPr lang="ja-JP" altLang="en-US" sz="1100" dirty="0">
+              <a:rPr lang="ja-JP" altLang="en-US" sz="1050" dirty="0">
                 <a:solidFill>
                   <a:srgbClr val="404040"/>
                 </a:solidFill>
@@ -9939,14 +10006,14 @@
               </a:rPr>
               <a:t>重い</a:t>
             </a:r>
-            <a:endParaRPr lang="ja-JP" sz="1100" dirty="0"/>
+            <a:endParaRPr lang="ja-JP" sz="1050" dirty="0"/>
           </a:p>
           <a:p>
             <a:pPr algn="ctr" indent="0" marL="0">
               <a:buNone/>
             </a:pPr>
             <a:r>
-              <a:rPr lang="ja-JP" altLang="en-US" sz="1100" dirty="0">
+              <a:rPr lang="ja-JP" altLang="en-US" sz="1050" dirty="0">
                 <a:solidFill>
                   <a:srgbClr val="404040"/>
                 </a:solidFill>
@@ -9956,7 +10023,7 @@
               </a:rPr>
               <a:t>副作用</a:t>
             </a:r>
-            <a:endParaRPr lang="ja-JP" sz="1100" dirty="0"/>
+            <a:endParaRPr lang="ja-JP" sz="1050" dirty="0"/>
           </a:p>
         </p:txBody>
       </p:sp>
@@ -9973,7 +10040,7 @@
           </a:xfrm>
           <a:prstGeom prst="roundRect">
             <a:avLst>
-              <a:gd name="adj" fmla="val 15625"/>
+              <a:gd name="adj" fmla="val 7813"/>
             </a:avLst>
           </a:prstGeom>
           <a:solidFill>
@@ -9982,14 +10049,14 @@
           <a:ln/>
         </p:spPr>
         <p:txBody>
-          <a:bodyPr wrap="square" lIns="0" tIns="0" rIns="0" bIns="0" rtlCol="0" anchor="ctr"/>
+          <a:bodyPr wrap="none" lIns="0" tIns="0" rIns="0" bIns="0" rtlCol="0" anchor="ctr"/>
           <a:lstStyle/>
           <a:p>
             <a:pPr algn="ctr" indent="0" marL="0">
               <a:buNone/>
             </a:pPr>
             <a:r>
-              <a:rPr lang="ja-JP" altLang="en-US" sz="1100" b="1" dirty="0">
+              <a:rPr lang="ja-JP" altLang="en-US" sz="1050" b="1" dirty="0">
                 <a:solidFill>
                   <a:srgbClr val="FFFFFF"/>
                 </a:solidFill>
@@ -9999,7 +10066,7 @@
               </a:rPr>
               <a:t>使い方</a:t>
             </a:r>
-            <a:endParaRPr lang="ja-JP" sz="1100" dirty="0"/>
+            <a:endParaRPr lang="ja-JP" sz="1050" dirty="0"/>
           </a:p>
         </p:txBody>
       </p:sp>
@@ -10106,8 +10173,8 @@
         </p:nvSpPr>
         <p:spPr>
           <a:xfrm>
-            <a:off x="502920" y="1828800"/>
-            <a:ext cx="11155680" cy="3630168"/>
+            <a:off x="502920" y="1764792"/>
+            <a:ext cx="11155680" cy="3886200"/>
           </a:xfrm>
           <a:prstGeom prst="rect">
             <a:avLst/>
@@ -10121,7 +10188,7 @@
           <a:p>
             <a:pPr algn="l" marL="381000" indent="-381000">
               <a:spcAft>
-                <a:spcPts val="2200"/>
+                <a:spcPts val="2600"/>
               </a:spcAft>
               <a:buSzPct val="100000"/>
               <a:buChar char="•"/>
@@ -10142,7 +10209,7 @@
           <a:p>
             <a:pPr algn="l" marL="381000" indent="-381000">
               <a:spcAft>
-                <a:spcPts val="2200"/>
+                <a:spcPts val="2600"/>
               </a:spcAft>
               <a:buSzPct val="100000"/>
               <a:buChar char="•"/>
@@ -10185,7 +10252,7 @@
           <a:p>
             <a:pPr algn="l" marL="381000" indent="-381000">
               <a:spcAft>
-                <a:spcPts val="2200"/>
+                <a:spcPts val="2600"/>
               </a:spcAft>
               <a:buSzPct val="100000"/>
               <a:buChar char="•"/>
@@ -10206,7 +10273,7 @@
           <a:p>
             <a:pPr algn="l" marL="381000" indent="-381000">
               <a:spcAft>
-                <a:spcPts val="2200"/>
+                <a:spcPts val="2600"/>
               </a:spcAft>
               <a:buSzPct val="100000"/>
               <a:buChar char="•"/>
@@ -10227,7 +10294,7 @@
           <a:p>
             <a:pPr algn="l" marL="381000" indent="-381000">
               <a:spcAft>
-                <a:spcPts val="2200"/>
+                <a:spcPts val="2600"/>
               </a:spcAft>
               <a:buSzPct val="100000"/>
               <a:buChar char="•"/>
